--- a/scripts/PowerPoint Slide Inventory Script/refined_v2/deck_final.pptx
+++ b/scripts/PowerPoint Slide Inventory Script/refined_v2/deck_final.pptx
@@ -15684,109 +15684,77 @@
           <a:lstStyle/>
           <a:p>
             <a:r>
-              <a:t>Six principal areas of specialism</a:t>
-            </a:r>
-          </a:p>
-        </p:txBody>
-      </p:sp>
-      <p:sp>
-        <p:nvSpPr>
-          <p:cNvPr id="3" name="Text Placeholder 2"/>
-          <p:cNvSpPr>
-            <a:spLocks noGrp="1"/>
-          </p:cNvSpPr>
-          <p:nvPr>
-            <p:ph type="body" idx="12" sz="quarter"/>
+              <a:t>Six DDaT specialisms across the lifecycle</a:t>
+            </a:r>
+          </a:p>
+        </p:txBody>
+      </p:sp>
+      <p:sp>
+        <p:nvSpPr>
+          <p:cNvPr id="3" name="Content Placeholder 2"/>
+          <p:cNvSpPr>
+            <a:spLocks noGrp="1"/>
+          </p:cNvSpPr>
+          <p:nvPr>
+            <p:ph idx="17" sz="quarter"/>
           </p:nvPr>
         </p:nvSpPr>
         <p:spPr/>
         <p:txBody>
           <a:bodyPr/>
           <a:lstStyle/>
-          <a:p>
-            <a:pPr>
-              <a:spcBef>
-                <a:spcPts val="400"/>
-              </a:spcBef>
-              <a:buChar char="•"/>
-            </a:pPr>
-            <a:r>
-              <a:rPr>
-                <a:latin typeface="Arial"/>
-              </a:rPr>
-              <a:t>Digital Service Design: user-centred, inclusive, outcome-driven</a:t>
-            </a:r>
-          </a:p>
-          <a:p>
-            <a:pPr>
-              <a:spcBef>
-                <a:spcPts val="400"/>
-              </a:spcBef>
-              <a:buChar char="•"/>
-            </a:pPr>
-            <a:r>
-              <a:rPr>
-                <a:latin typeface="Arial"/>
-              </a:rPr>
-              <a:t>Data, Analytics &amp; AI: governed platforms, predictive insights</a:t>
-            </a:r>
-          </a:p>
-          <a:p>
-            <a:pPr>
-              <a:spcBef>
-                <a:spcPts val="400"/>
-              </a:spcBef>
-              <a:buChar char="•"/>
-            </a:pPr>
-            <a:r>
-              <a:rPr>
-                <a:latin typeface="Arial"/>
-              </a:rPr>
-              <a:t>Platforms &amp; Integration: modular, API-led architectures</a:t>
-            </a:r>
-          </a:p>
-          <a:p>
-            <a:pPr>
-              <a:spcBef>
-                <a:spcPts val="400"/>
-              </a:spcBef>
-              <a:buChar char="•"/>
-            </a:pPr>
-            <a:r>
-              <a:rPr>
-                <a:latin typeface="Arial"/>
-              </a:rPr>
-              <a:t>Cloud &amp; DevOps: secure hybrid adoption, FinOps, resilience</a:t>
-            </a:r>
-          </a:p>
-          <a:p>
-            <a:pPr>
-              <a:spcBef>
-                <a:spcPts val="400"/>
-              </a:spcBef>
-              <a:buChar char="•"/>
-            </a:pPr>
-            <a:r>
-              <a:rPr>
-                <a:latin typeface="Arial"/>
-              </a:rPr>
-              <a:t>Technical Consultancy: advisory, coaching, embedded delivery</a:t>
-            </a:r>
-          </a:p>
-          <a:p>
-            <a:pPr>
-              <a:spcBef>
-                <a:spcPts val="400"/>
-              </a:spcBef>
-              <a:buChar char="•"/>
-            </a:pPr>
-            <a:r>
-              <a:rPr>
-                <a:latin typeface="Arial"/>
-              </a:rPr>
-              <a:t>Agile Delivery: product-led, measurable value, scaling</a:t>
-            </a:r>
-          </a:p>
+          <a:p/>
+        </p:txBody>
+      </p:sp>
+      <p:sp>
+        <p:nvSpPr>
+          <p:cNvPr id="4" name="Content Placeholder 3"/>
+          <p:cNvSpPr>
+            <a:spLocks noGrp="1"/>
+          </p:cNvSpPr>
+          <p:nvPr>
+            <p:ph idx="18" sz="quarter"/>
+          </p:nvPr>
+        </p:nvSpPr>
+        <p:spPr/>
+        <p:txBody>
+          <a:bodyPr/>
+          <a:lstStyle/>
+          <a:p/>
+        </p:txBody>
+      </p:sp>
+      <p:sp>
+        <p:nvSpPr>
+          <p:cNvPr id="5" name="Content Placeholder 4"/>
+          <p:cNvSpPr>
+            <a:spLocks noGrp="1"/>
+          </p:cNvSpPr>
+          <p:nvPr>
+            <p:ph idx="20" sz="quarter"/>
+          </p:nvPr>
+        </p:nvSpPr>
+        <p:spPr/>
+        <p:txBody>
+          <a:bodyPr/>
+          <a:lstStyle/>
+          <a:p/>
+        </p:txBody>
+      </p:sp>
+      <p:sp>
+        <p:nvSpPr>
+          <p:cNvPr id="6" name="Content Placeholder 5"/>
+          <p:cNvSpPr>
+            <a:spLocks noGrp="1"/>
+          </p:cNvSpPr>
+          <p:nvPr>
+            <p:ph idx="19" sz="quarter"/>
+          </p:nvPr>
+        </p:nvSpPr>
+        <p:spPr/>
+        <p:txBody>
+          <a:bodyPr/>
+          <a:lstStyle/>
+          <a:p/>
         </p:txBody>
       </p:sp>
     </p:spTree>
@@ -15830,118 +15798,70 @@
       </p:sp>
       <p:sp>
         <p:nvSpPr>
-          <p:cNvPr id="3" name="Text Placeholder 2"/>
-          <p:cNvSpPr>
-            <a:spLocks noGrp="1"/>
-          </p:cNvSpPr>
-          <p:nvPr>
-            <p:ph type="body" idx="12" sz="quarter"/>
+          <p:cNvPr id="3" name="Content Placeholder 2"/>
+          <p:cNvSpPr>
+            <a:spLocks noGrp="1"/>
+          </p:cNvSpPr>
+          <p:nvPr>
+            <p:ph idx="17" sz="quarter"/>
           </p:nvPr>
         </p:nvSpPr>
         <p:spPr/>
         <p:txBody>
           <a:bodyPr/>
           <a:lstStyle/>
-          <a:p>
-            <a:pPr>
-              <a:spcBef>
-                <a:spcPts val="400"/>
-              </a:spcBef>
-            </a:pPr>
-            <a:r>
-              <a:rPr>
-                <a:latin typeface="Arial"/>
-              </a:rPr>
-              <a:t>Strategic governance: align to priorities</a:t>
-            </a:r>
-          </a:p>
-        </p:txBody>
-      </p:sp>
-      <p:sp>
-        <p:nvSpPr>
-          <p:cNvPr id="4" name="Text Placeholder 3"/>
-          <p:cNvSpPr>
-            <a:spLocks noGrp="1"/>
-          </p:cNvSpPr>
-          <p:nvPr>
-            <p:ph type="body" idx="13" sz="quarter"/>
+          <a:p/>
+        </p:txBody>
+      </p:sp>
+      <p:sp>
+        <p:nvSpPr>
+          <p:cNvPr id="4" name="Content Placeholder 3"/>
+          <p:cNvSpPr>
+            <a:spLocks noGrp="1"/>
+          </p:cNvSpPr>
+          <p:nvPr>
+            <p:ph idx="18" sz="quarter"/>
           </p:nvPr>
         </p:nvSpPr>
         <p:spPr/>
         <p:txBody>
           <a:bodyPr/>
           <a:lstStyle/>
-          <a:p>
-            <a:pPr>
-              <a:spcBef>
-                <a:spcPts val="400"/>
-              </a:spcBef>
-            </a:pPr>
-            <a:r>
-              <a:rPr>
-                <a:latin typeface="Arial"/>
-              </a:rPr>
-              <a:t>Programme governance: milestones &amp; risk</a:t>
-            </a:r>
-          </a:p>
-        </p:txBody>
-      </p:sp>
-      <p:sp>
-        <p:nvSpPr>
-          <p:cNvPr id="5" name="Text Placeholder 4"/>
-          <p:cNvSpPr>
-            <a:spLocks noGrp="1"/>
-          </p:cNvSpPr>
-          <p:nvPr>
-            <p:ph type="body" idx="14" sz="quarter"/>
+          <a:p/>
+        </p:txBody>
+      </p:sp>
+      <p:sp>
+        <p:nvSpPr>
+          <p:cNvPr id="5" name="Content Placeholder 4"/>
+          <p:cNvSpPr>
+            <a:spLocks noGrp="1"/>
+          </p:cNvSpPr>
+          <p:nvPr>
+            <p:ph idx="20" sz="quarter"/>
           </p:nvPr>
         </p:nvSpPr>
         <p:spPr/>
         <p:txBody>
           <a:bodyPr/>
           <a:lstStyle/>
-          <a:p>
-            <a:pPr>
-              <a:spcBef>
-                <a:spcPts val="400"/>
-              </a:spcBef>
-            </a:pPr>
-            <a:r>
-              <a:rPr>
-                <a:latin typeface="Arial"/>
-              </a:rPr>
-              <a:t>Technical governance: standards &amp; assurance</a:t>
-            </a:r>
-          </a:p>
-        </p:txBody>
-      </p:sp>
-      <p:sp>
-        <p:nvSpPr>
-          <p:cNvPr id="6" name="Text Placeholder 5"/>
-          <p:cNvSpPr>
-            <a:spLocks noGrp="1"/>
-          </p:cNvSpPr>
-          <p:nvPr>
-            <p:ph type="body" idx="15" sz="quarter"/>
+          <a:p/>
+        </p:txBody>
+      </p:sp>
+      <p:sp>
+        <p:nvSpPr>
+          <p:cNvPr id="6" name="Content Placeholder 5"/>
+          <p:cNvSpPr>
+            <a:spLocks noGrp="1"/>
+          </p:cNvSpPr>
+          <p:nvPr>
+            <p:ph idx="19" sz="quarter"/>
           </p:nvPr>
         </p:nvSpPr>
         <p:spPr/>
         <p:txBody>
           <a:bodyPr/>
           <a:lstStyle/>
-          <a:p>
-            <a:pPr>
-              <a:spcBef>
-                <a:spcPts val="400"/>
-              </a:spcBef>
-            </a:pPr>
-            <a:r>
-              <a:rPr>
-                <a:latin typeface="Arial"/>
-              </a:rPr>
-              <a:t>Embedded risk management: proactive mitigation</a:t>
-            </a:r>
-          </a:p>
+          <a:p/>
         </p:txBody>
       </p:sp>
     </p:spTree>
@@ -15978,7 +15898,7 @@
           <a:lstStyle/>
           <a:p>
             <a:r>
-              <a:t>Proven outcomes in UK public sector transformation</a:t>
+              <a:t>Proven DDaT outcomes across UK public sector</a:t>
             </a:r>
           </a:p>
         </p:txBody>
@@ -16008,7 +15928,49 @@
               <a:rPr>
                 <a:latin typeface="Arial"/>
               </a:rPr>
-              <a:t>IBM and Stable delivered successful DDaT programmes for UK public sector clients.</a:t>
+              <a:t>Environment Agency: unified data platform in 11 months</a:t>
+            </a:r>
+          </a:p>
+          <a:p>
+            <a:pPr>
+              <a:spcBef>
+                <a:spcPts val="400"/>
+              </a:spcBef>
+              <a:buChar char="•"/>
+            </a:pPr>
+            <a:r>
+              <a:rPr>
+                <a:latin typeface="Arial"/>
+              </a:rPr>
+              <a:t>DVLA: 30% faster data processing</a:t>
+            </a:r>
+          </a:p>
+          <a:p>
+            <a:pPr>
+              <a:spcBef>
+                <a:spcPts val="400"/>
+              </a:spcBef>
+              <a:buChar char="•"/>
+            </a:pPr>
+            <a:r>
+              <a:rPr>
+                <a:latin typeface="Arial"/>
+              </a:rPr>
+              <a:t>Welsh charities: bilingual digital services</a:t>
+            </a:r>
+          </a:p>
+          <a:p>
+            <a:pPr>
+              <a:spcBef>
+                <a:spcPts val="400"/>
+              </a:spcBef>
+              <a:buChar char="•"/>
+            </a:pPr>
+            <a:r>
+              <a:rPr>
+                <a:latin typeface="Arial"/>
+              </a:rPr>
+              <a:t>NHS Digital: 18-month integration programme</a:t>
             </a:r>
           </a:p>
         </p:txBody>
@@ -16086,7 +16048,7 @@
           <a:lstStyle/>
           <a:p>
             <a:r>
-              <a:t>Discovery to shape the delivery roadmap</a:t>
+              <a:t>Customer Platform discovery to shape the roadmap</a:t>
             </a:r>
           </a:p>
         </p:txBody>
@@ -16116,7 +16078,7 @@
               <a:rPr>
                 <a:latin typeface="Arial"/>
               </a:rPr>
-              <a:t>Embed IBM + Stable team with NRW stakeholders</a:t>
+              <a:t>Blended IBM + Stable team embedded with NRW</a:t>
             </a:r>
           </a:p>
           <a:p>
@@ -16130,7 +16092,7 @@
               <a:rPr>
                 <a:latin typeface="Arial"/>
               </a:rPr>
-              <a:t>Run three parallel workstreams: user, technical, commercial</a:t>
+              <a:t>Three parallel workstreams: user, technical, commercial</a:t>
             </a:r>
           </a:p>
           <a:p>
@@ -16144,7 +16106,7 @@
               <a:rPr>
                 <a:latin typeface="Arial"/>
               </a:rPr>
-              <a:t>Mobilise discovery to shape the target roadmap</a:t>
+              <a:t>Discovery mobilises and shapes the roadmap</a:t>
             </a:r>
           </a:p>
         </p:txBody>
@@ -16174,7 +16136,7 @@
               <a:rPr>
                 <a:latin typeface="Arial"/>
               </a:rPr>
-              <a:t>Validate needs and operational context locally</a:t>
+              <a:t>User research, service mapping, analytics</a:t>
             </a:r>
           </a:p>
           <a:p>
@@ -16188,7 +16150,7 @@
               <a:rPr>
                 <a:latin typeface="Arial"/>
               </a:rPr>
-              <a:t>Assess Microsoft ecosystem fit and technical options</a:t>
+              <a:t>Technical assessment of the Microsoft ecosystem</a:t>
             </a:r>
           </a:p>
           <a:p>
@@ -16202,7 +16164,7 @@
               <a:rPr>
                 <a:latin typeface="Arial"/>
               </a:rPr>
-              <a:t>Define commercial model and delivery sequencing</a:t>
+              <a:t>Commercial review and delivery sequencing</a:t>
             </a:r>
           </a:p>
         </p:txBody>
@@ -16241,125 +16203,77 @@
           <a:lstStyle/>
           <a:p>
             <a:r>
-              <a:t>Discovery outputs — foundation for platform evolution</a:t>
-            </a:r>
-          </a:p>
-        </p:txBody>
-      </p:sp>
-      <p:sp>
-        <p:nvSpPr>
-          <p:cNvPr id="3" name="Text Placeholder 2"/>
-          <p:cNvSpPr>
-            <a:spLocks noGrp="1"/>
-          </p:cNvSpPr>
-          <p:nvPr>
-            <p:ph type="body" idx="12" sz="quarter"/>
+              <a:t>Discovery outputs to evolve the platform</a:t>
+            </a:r>
+          </a:p>
+        </p:txBody>
+      </p:sp>
+      <p:sp>
+        <p:nvSpPr>
+          <p:cNvPr id="3" name="Content Placeholder 2"/>
+          <p:cNvSpPr>
+            <a:spLocks noGrp="1"/>
+          </p:cNvSpPr>
+          <p:nvPr>
+            <p:ph idx="17" sz="quarter"/>
           </p:nvPr>
         </p:nvSpPr>
         <p:spPr/>
         <p:txBody>
           <a:bodyPr/>
           <a:lstStyle/>
-          <a:p>
-            <a:pPr>
-              <a:spcBef>
-                <a:spcPts val="400"/>
-              </a:spcBef>
-            </a:pPr>
-            <a:r>
-              <a:rPr>
-                <a:latin typeface="Arial"/>
-              </a:rPr>
-              <a:t>Prioritised 18–24 month service roadmap</a:t>
-            </a:r>
-          </a:p>
-        </p:txBody>
-      </p:sp>
-      <p:sp>
-        <p:nvSpPr>
-          <p:cNvPr id="4" name="Text Placeholder 3"/>
-          <p:cNvSpPr>
-            <a:spLocks noGrp="1"/>
-          </p:cNvSpPr>
-          <p:nvPr>
-            <p:ph type="body" idx="13" sz="quarter"/>
+          <a:p/>
+        </p:txBody>
+      </p:sp>
+      <p:sp>
+        <p:nvSpPr>
+          <p:cNvPr id="4" name="Content Placeholder 3"/>
+          <p:cNvSpPr>
+            <a:spLocks noGrp="1"/>
+          </p:cNvSpPr>
+          <p:nvPr>
+            <p:ph idx="18" sz="quarter"/>
           </p:nvPr>
         </p:nvSpPr>
         <p:spPr/>
         <p:txBody>
           <a:bodyPr/>
           <a:lstStyle/>
-          <a:p>
-            <a:pPr>
-              <a:spcBef>
-                <a:spcPts val="400"/>
-              </a:spcBef>
-            </a:pPr>
-            <a:r>
-              <a:rPr>
-                <a:latin typeface="Arial"/>
-              </a:rPr>
-              <a:t>Architectural direction aligned to Microsoft estate</a:t>
-            </a:r>
-          </a:p>
-        </p:txBody>
-      </p:sp>
-      <p:sp>
-        <p:nvSpPr>
-          <p:cNvPr id="5" name="Text Placeholder 4"/>
-          <p:cNvSpPr>
-            <a:spLocks noGrp="1"/>
-          </p:cNvSpPr>
-          <p:nvPr>
-            <p:ph type="body" idx="14" sz="quarter"/>
+          <a:p/>
+        </p:txBody>
+      </p:sp>
+      <p:sp>
+        <p:nvSpPr>
+          <p:cNvPr id="5" name="Content Placeholder 4"/>
+          <p:cNvSpPr>
+            <a:spLocks noGrp="1"/>
+          </p:cNvSpPr>
+          <p:nvPr>
+            <p:ph idx="20" sz="quarter"/>
           </p:nvPr>
         </p:nvSpPr>
         <p:spPr/>
         <p:txBody>
           <a:bodyPr/>
           <a:lstStyle/>
-          <a:p>
-            <a:pPr>
-              <a:spcBef>
-                <a:spcPts val="400"/>
-              </a:spcBef>
-            </a:pPr>
-            <a:r>
-              <a:rPr>
-                <a:latin typeface="Arial"/>
-              </a:rPr>
-              <a:t>Platform capability model and integrations</a:t>
-            </a:r>
-          </a:p>
-        </p:txBody>
-      </p:sp>
-      <p:sp>
-        <p:nvSpPr>
-          <p:cNvPr id="6" name="Text Placeholder 5"/>
-          <p:cNvSpPr>
-            <a:spLocks noGrp="1"/>
-          </p:cNvSpPr>
-          <p:nvPr>
-            <p:ph type="body" idx="15" sz="quarter"/>
+          <a:p/>
+        </p:txBody>
+      </p:sp>
+      <p:sp>
+        <p:nvSpPr>
+          <p:cNvPr id="6" name="Content Placeholder 5"/>
+          <p:cNvSpPr>
+            <a:spLocks noGrp="1"/>
+          </p:cNvSpPr>
+          <p:nvPr>
+            <p:ph idx="19" sz="quarter"/>
           </p:nvPr>
         </p:nvSpPr>
         <p:spPr/>
         <p:txBody>
           <a:bodyPr/>
           <a:lstStyle/>
-          <a:p>
-            <a:pPr>
-              <a:spcBef>
-                <a:spcPts val="400"/>
-              </a:spcBef>
-            </a:pPr>
-            <a:r>
-              <a:rPr>
-                <a:latin typeface="Arial"/>
-              </a:rPr>
-              <a:t>Sequenced delivery plan and mobilisation</a:t>
-            </a:r>
-          </a:p>
+          <a:p/>
         </p:txBody>
       </p:sp>
     </p:spTree>
@@ -16396,96 +16310,76 @@
           <a:lstStyle/>
           <a:p>
             <a:r>
-              <a:t>Foundational architecture for NRW on the Microsoft ecosystem</a:t>
-            </a:r>
-          </a:p>
-        </p:txBody>
-      </p:sp>
-      <p:sp>
-        <p:nvSpPr>
-          <p:cNvPr id="3" name="Text Placeholder 2"/>
-          <p:cNvSpPr>
-            <a:spLocks noGrp="1"/>
-          </p:cNvSpPr>
-          <p:nvPr>
-            <p:ph type="body" idx="13" sz="quarter"/>
+              <a:t>Foundational architecture for NRW on Microsoft</a:t>
+            </a:r>
+          </a:p>
+        </p:txBody>
+      </p:sp>
+      <p:sp>
+        <p:nvSpPr>
+          <p:cNvPr id="3" name="Content Placeholder 2"/>
+          <p:cNvSpPr>
+            <a:spLocks noGrp="1"/>
+          </p:cNvSpPr>
+          <p:nvPr>
+            <p:ph idx="17" sz="quarter"/>
           </p:nvPr>
         </p:nvSpPr>
         <p:spPr/>
         <p:txBody>
           <a:bodyPr/>
           <a:lstStyle/>
-          <a:p>
-            <a:pPr>
-              <a:spcBef>
-                <a:spcPts val="400"/>
-              </a:spcBef>
-              <a:buChar char="•"/>
-            </a:pPr>
-            <a:r>
-              <a:rPr>
-                <a:latin typeface="Arial"/>
-              </a:rPr>
-              <a:t>Layer 1: Engagement — channels and customer touchpoints</a:t>
-            </a:r>
-          </a:p>
-          <a:p>
-            <a:pPr>
-              <a:spcBef>
-                <a:spcPts val="400"/>
-              </a:spcBef>
-              <a:buChar char="•"/>
-            </a:pPr>
-            <a:r>
-              <a:rPr>
-                <a:latin typeface="Arial"/>
-              </a:rPr>
-              <a:t>Layer 2: CRM — Dynamics 365 as authoritative customer domain</a:t>
-            </a:r>
-          </a:p>
-          <a:p>
-            <a:pPr>
-              <a:spcBef>
-                <a:spcPts val="400"/>
-              </a:spcBef>
-              <a:buChar char="•"/>
-            </a:pPr>
-            <a:r>
-              <a:rPr>
-                <a:latin typeface="Arial"/>
-              </a:rPr>
-              <a:t>Layer 3: Integration — Azure services for orchestration and APIs</a:t>
-            </a:r>
-          </a:p>
-          <a:p>
-            <a:pPr>
-              <a:spcBef>
-                <a:spcPts val="400"/>
-              </a:spcBef>
-              <a:buChar char="•"/>
-            </a:pPr>
-            <a:r>
-              <a:rPr>
-                <a:latin typeface="Arial"/>
-              </a:rPr>
-              <a:t>Layer 4: Data — analytics and insights from the data platform</a:t>
-            </a:r>
-          </a:p>
-        </p:txBody>
-      </p:sp>
-      <p:sp>
-        <p:nvSpPr>
-          <p:cNvPr id="4" name="Picture Placeholder 3"/>
-          <p:cNvSpPr>
-            <a:spLocks noGrp="1"/>
-          </p:cNvSpPr>
-          <p:nvPr>
-            <p:ph type="pic" idx="14" sz="quarter"/>
-          </p:nvPr>
-        </p:nvSpPr>
-        <p:spPr/>
-        <p:txBody>
-          <a:bodyPr/>
+          <a:p/>
+        </p:txBody>
+      </p:sp>
+      <p:sp>
+        <p:nvSpPr>
+          <p:cNvPr id="4" name="Content Placeholder 3"/>
+          <p:cNvSpPr>
+            <a:spLocks noGrp="1"/>
+          </p:cNvSpPr>
+          <p:nvPr>
+            <p:ph idx="18" sz="quarter"/>
+          </p:nvPr>
+        </p:nvSpPr>
+        <p:spPr/>
+        <p:txBody>
+          <a:bodyPr/>
+          <a:lstStyle/>
+          <a:p/>
+        </p:txBody>
+      </p:sp>
+      <p:sp>
+        <p:nvSpPr>
+          <p:cNvPr id="5" name="Content Placeholder 4"/>
+          <p:cNvSpPr>
+            <a:spLocks noGrp="1"/>
+          </p:cNvSpPr>
+          <p:nvPr>
+            <p:ph idx="20" sz="quarter"/>
+          </p:nvPr>
+        </p:nvSpPr>
+        <p:spPr/>
+        <p:txBody>
+          <a:bodyPr/>
+          <a:lstStyle/>
+          <a:p/>
+        </p:txBody>
+      </p:sp>
+      <p:sp>
+        <p:nvSpPr>
+          <p:cNvPr id="6" name="Content Placeholder 5"/>
+          <p:cNvSpPr>
+            <a:spLocks noGrp="1"/>
+          </p:cNvSpPr>
+          <p:nvPr>
+            <p:ph idx="19" sz="quarter"/>
+          </p:nvPr>
+        </p:nvSpPr>
+        <p:spPr/>
+        <p:txBody>
+          <a:bodyPr/>
+          <a:lstStyle/>
           <a:p/>
         </p:txBody>
       </p:sp>
@@ -16523,125 +16417,77 @@
           <a:lstStyle/>
           <a:p>
             <a:r>
-              <a:t>Key architectural principles for platform evolution</a:t>
-            </a:r>
-          </a:p>
-        </p:txBody>
-      </p:sp>
-      <p:sp>
-        <p:nvSpPr>
-          <p:cNvPr id="3" name="Text Placeholder 2"/>
-          <p:cNvSpPr>
-            <a:spLocks noGrp="1"/>
-          </p:cNvSpPr>
-          <p:nvPr>
-            <p:ph type="body" idx="12" sz="quarter"/>
+              <a:t>Architectural principles for platform evolution</a:t>
+            </a:r>
+          </a:p>
+        </p:txBody>
+      </p:sp>
+      <p:sp>
+        <p:nvSpPr>
+          <p:cNvPr id="3" name="Content Placeholder 2"/>
+          <p:cNvSpPr>
+            <a:spLocks noGrp="1"/>
+          </p:cNvSpPr>
+          <p:nvPr>
+            <p:ph idx="17" sz="quarter"/>
           </p:nvPr>
         </p:nvSpPr>
         <p:spPr/>
         <p:txBody>
           <a:bodyPr/>
           <a:lstStyle/>
-          <a:p>
-            <a:pPr>
-              <a:spcBef>
-                <a:spcPts val="400"/>
-              </a:spcBef>
-            </a:pPr>
-            <a:r>
-              <a:rPr>
-                <a:latin typeface="Arial"/>
-              </a:rPr>
-              <a:t>Cloud-first, SaaS-preferred, managed services</a:t>
-            </a:r>
-          </a:p>
-        </p:txBody>
-      </p:sp>
-      <p:sp>
-        <p:nvSpPr>
-          <p:cNvPr id="4" name="Text Placeholder 3"/>
-          <p:cNvSpPr>
-            <a:spLocks noGrp="1"/>
-          </p:cNvSpPr>
-          <p:nvPr>
-            <p:ph type="body" idx="13" sz="quarter"/>
+          <a:p/>
+        </p:txBody>
+      </p:sp>
+      <p:sp>
+        <p:nvSpPr>
+          <p:cNvPr id="4" name="Content Placeholder 3"/>
+          <p:cNvSpPr>
+            <a:spLocks noGrp="1"/>
+          </p:cNvSpPr>
+          <p:nvPr>
+            <p:ph idx="18" sz="quarter"/>
           </p:nvPr>
         </p:nvSpPr>
         <p:spPr/>
         <p:txBody>
           <a:bodyPr/>
           <a:lstStyle/>
-          <a:p>
-            <a:pPr>
-              <a:spcBef>
-                <a:spcPts val="400"/>
-              </a:spcBef>
-            </a:pPr>
-            <a:r>
-              <a:rPr>
-                <a:latin typeface="Arial"/>
-              </a:rPr>
-              <a:t>Modularity and loose coupling</a:t>
-            </a:r>
-          </a:p>
-        </p:txBody>
-      </p:sp>
-      <p:sp>
-        <p:nvSpPr>
-          <p:cNvPr id="5" name="Text Placeholder 4"/>
-          <p:cNvSpPr>
-            <a:spLocks noGrp="1"/>
-          </p:cNvSpPr>
-          <p:nvPr>
-            <p:ph type="body" idx="14" sz="quarter"/>
+          <a:p/>
+        </p:txBody>
+      </p:sp>
+      <p:sp>
+        <p:nvSpPr>
+          <p:cNvPr id="5" name="Content Placeholder 4"/>
+          <p:cNvSpPr>
+            <a:spLocks noGrp="1"/>
+          </p:cNvSpPr>
+          <p:nvPr>
+            <p:ph idx="20" sz="quarter"/>
           </p:nvPr>
         </p:nvSpPr>
         <p:spPr/>
         <p:txBody>
           <a:bodyPr/>
           <a:lstStyle/>
-          <a:p>
-            <a:pPr>
-              <a:spcBef>
-                <a:spcPts val="400"/>
-              </a:spcBef>
-            </a:pPr>
-            <a:r>
-              <a:rPr>
-                <a:latin typeface="Arial"/>
-              </a:rPr>
-              <a:t>API-first and event-driven patterns</a:t>
-            </a:r>
-          </a:p>
-        </p:txBody>
-      </p:sp>
-      <p:sp>
-        <p:nvSpPr>
-          <p:cNvPr id="6" name="Text Placeholder 5"/>
-          <p:cNvSpPr>
-            <a:spLocks noGrp="1"/>
-          </p:cNvSpPr>
-          <p:nvPr>
-            <p:ph type="body" idx="15" sz="quarter"/>
+          <a:p/>
+        </p:txBody>
+      </p:sp>
+      <p:sp>
+        <p:nvSpPr>
+          <p:cNvPr id="6" name="Content Placeholder 5"/>
+          <p:cNvSpPr>
+            <a:spLocks noGrp="1"/>
+          </p:cNvSpPr>
+          <p:nvPr>
+            <p:ph idx="19" sz="quarter"/>
           </p:nvPr>
         </p:nvSpPr>
         <p:spPr/>
         <p:txBody>
           <a:bodyPr/>
           <a:lstStyle/>
-          <a:p>
-            <a:pPr>
-              <a:spcBef>
-                <a:spcPts val="400"/>
-              </a:spcBef>
-            </a:pPr>
-            <a:r>
-              <a:rPr>
-                <a:latin typeface="Arial"/>
-              </a:rPr>
-              <a:t>Data governance, security and privacy by design</a:t>
-            </a:r>
-          </a:p>
+          <a:p/>
         </p:txBody>
       </p:sp>
     </p:spTree>
@@ -16678,7 +16524,7 @@
           <a:lstStyle/>
           <a:p>
             <a:r>
-              <a:t>Addressing customer data fragmentation</a:t>
+              <a:t>Solving Customer Data Fragmentation</a:t>
             </a:r>
           </a:p>
         </p:txBody>
@@ -16736,7 +16582,7 @@
               <a:rPr>
                 <a:latin typeface="Arial"/>
               </a:rPr>
-              <a:t>Fragmented user journeys and experiences</a:t>
+              <a:t>Fragmented journeys and touchpoints</a:t>
             </a:r>
           </a:p>
           <a:p>
@@ -16750,7 +16596,7 @@
               <a:rPr>
                 <a:latin typeface="Arial"/>
               </a:rPr>
-              <a:t>Lack of real-time, coherent customer view</a:t>
+              <a:t>No real-time, coherent customer view</a:t>
             </a:r>
           </a:p>
         </p:txBody>
@@ -16789,7 +16635,7 @@
           <a:lstStyle/>
           <a:p>
             <a:r>
-              <a:t>Governed, platform-first customer data integration</a:t>
+              <a:t>Data integration &amp; platform thinking</a:t>
             </a:r>
           </a:p>
         </p:txBody>
@@ -16833,7 +16679,7 @@
               <a:rPr>
                 <a:latin typeface="Arial"/>
               </a:rPr>
-              <a:t>Establish a shared customer identifier model</a:t>
+              <a:t>Define a shared customer identifier model</a:t>
             </a:r>
           </a:p>
           <a:p>
@@ -17125,7 +16971,7 @@
           <a:lstStyle/>
           <a:p>
             <a:r>
-              <a:t>Data integration risks and mitigations</a:t>
+              <a:t>Data integration risks: key mitigations</a:t>
             </a:r>
           </a:p>
         </p:txBody>
@@ -17155,7 +17001,7 @@
               <a:rPr>
                 <a:latin typeface="Arial"/>
               </a:rPr>
-              <a:t>Poor data quality lowers match accuracy</a:t>
+              <a:t>Profile &amp; validate data to improve match accuracy</a:t>
             </a:r>
           </a:p>
           <a:p>
@@ -17169,7 +17015,7 @@
               <a:rPr>
                 <a:latin typeface="Arial"/>
               </a:rPr>
-              <a:t>Hidden dependencies in legacy systems</a:t>
+              <a:t>Identify legacy dependencies early to avoid delivery delays</a:t>
             </a:r>
           </a:p>
           <a:p>
@@ -17183,9 +17029,25 @@
               <a:rPr>
                 <a:latin typeface="Arial"/>
               </a:rPr>
-              <a:t>Performance and security constraints</a:t>
-            </a:r>
-          </a:p>
+              <a:t>Apply performance &amp; security constraints to protect throughput</a:t>
+            </a:r>
+          </a:p>
+        </p:txBody>
+      </p:sp>
+      <p:sp>
+        <p:nvSpPr>
+          <p:cNvPr id="4" name="Text Placeholder 3"/>
+          <p:cNvSpPr>
+            <a:spLocks noGrp="1"/>
+          </p:cNvSpPr>
+          <p:nvPr>
+            <p:ph type="body" idx="12" sz="quarter"/>
+          </p:nvPr>
+        </p:nvSpPr>
+        <p:spPr/>
+        <p:txBody>
+          <a:bodyPr/>
+          <a:lstStyle/>
           <a:p>
             <a:pPr>
               <a:spcBef>
@@ -17197,25 +17059,9 @@
               <a:rPr>
                 <a:latin typeface="Arial"/>
               </a:rPr>
-              <a:t>Unclear ownership of customer data</a:t>
-            </a:r>
-          </a:p>
-        </p:txBody>
-      </p:sp>
-      <p:sp>
-        <p:nvSpPr>
-          <p:cNvPr id="4" name="Text Placeholder 3"/>
-          <p:cNvSpPr>
-            <a:spLocks noGrp="1"/>
-          </p:cNvSpPr>
-          <p:nvPr>
-            <p:ph type="body" idx="12" sz="quarter"/>
-          </p:nvPr>
-        </p:nvSpPr>
-        <p:spPr/>
-        <p:txBody>
-          <a:bodyPr/>
-          <a:lstStyle/>
+              <a:t>Define ownership to strengthen governance &amp; accountability</a:t>
+            </a:r>
+          </a:p>
           <a:p>
             <a:pPr>
               <a:spcBef>
@@ -17227,7 +17073,7 @@
               <a:rPr>
                 <a:latin typeface="Arial"/>
               </a:rPr>
-              <a:t>Profile and validate before integration</a:t>
+              <a:t>Use an integration layer to wrap legacy systems</a:t>
             </a:r>
           </a:p>
           <a:p>
@@ -17241,7 +17087,7 @@
               <a:rPr>
                 <a:latin typeface="Arial"/>
               </a:rPr>
-              <a:t>Add an integration layer around legacy</a:t>
+              <a:t>Adopt API-driven connectivity with strong governance</a:t>
             </a:r>
           </a:p>
           <a:p>
@@ -17255,21 +17101,7 @@
               <a:rPr>
                 <a:latin typeface="Arial"/>
               </a:rPr>
-              <a:t>Use API connectivity with strong governance</a:t>
-            </a:r>
-          </a:p>
-          <a:p>
-            <a:pPr>
-              <a:spcBef>
-                <a:spcPts val="400"/>
-              </a:spcBef>
-              <a:buChar char="•"/>
-            </a:pPr>
-            <a:r>
-              <a:rPr>
-                <a:latin typeface="Arial"/>
-              </a:rPr>
-              <a:t>Resolve identity early; sequence by risk</a:t>
+              <a:t>Sequence identity resolution by risk, then scale</a:t>
             </a:r>
           </a:p>
         </p:txBody>
@@ -17308,125 +17140,77 @@
           <a:lstStyle/>
           <a:p>
             <a:r>
-              <a:t>Multidisciplinary delivery teams</a:t>
-            </a:r>
-          </a:p>
-        </p:txBody>
-      </p:sp>
-      <p:sp>
-        <p:nvSpPr>
-          <p:cNvPr id="3" name="Text Placeholder 2"/>
-          <p:cNvSpPr>
-            <a:spLocks noGrp="1"/>
-          </p:cNvSpPr>
-          <p:nvPr>
-            <p:ph type="body" idx="12" sz="quarter"/>
+              <a:t>Multidisciplinary delivery team structure</a:t>
+            </a:r>
+          </a:p>
+        </p:txBody>
+      </p:sp>
+      <p:sp>
+        <p:nvSpPr>
+          <p:cNvPr id="3" name="Content Placeholder 2"/>
+          <p:cNvSpPr>
+            <a:spLocks noGrp="1"/>
+          </p:cNvSpPr>
+          <p:nvPr>
+            <p:ph idx="17" sz="quarter"/>
           </p:nvPr>
         </p:nvSpPr>
         <p:spPr/>
         <p:txBody>
           <a:bodyPr/>
           <a:lstStyle/>
-          <a:p>
-            <a:pPr>
-              <a:spcBef>
-                <a:spcPts val="400"/>
-              </a:spcBef>
-            </a:pPr>
-            <a:r>
-              <a:rPr>
-                <a:latin typeface="Arial"/>
-              </a:rPr>
-              <a:t>Service design, business analysis, architecture</a:t>
-            </a:r>
-          </a:p>
-        </p:txBody>
-      </p:sp>
-      <p:sp>
-        <p:nvSpPr>
-          <p:cNvPr id="4" name="Text Placeholder 3"/>
-          <p:cNvSpPr>
-            <a:spLocks noGrp="1"/>
-          </p:cNvSpPr>
-          <p:nvPr>
-            <p:ph type="body" idx="13" sz="quarter"/>
+          <a:p/>
+        </p:txBody>
+      </p:sp>
+      <p:sp>
+        <p:nvSpPr>
+          <p:cNvPr id="4" name="Content Placeholder 3"/>
+          <p:cNvSpPr>
+            <a:spLocks noGrp="1"/>
+          </p:cNvSpPr>
+          <p:nvPr>
+            <p:ph idx="18" sz="quarter"/>
           </p:nvPr>
         </p:nvSpPr>
         <p:spPr/>
         <p:txBody>
           <a:bodyPr/>
           <a:lstStyle/>
-          <a:p>
-            <a:pPr>
-              <a:spcBef>
-                <a:spcPts val="400"/>
-              </a:spcBef>
-            </a:pPr>
-            <a:r>
-              <a:rPr>
-                <a:latin typeface="Arial"/>
-              </a:rPr>
-              <a:t>Platform engineering, data specialists, product management</a:t>
-            </a:r>
-          </a:p>
-        </p:txBody>
-      </p:sp>
-      <p:sp>
-        <p:nvSpPr>
-          <p:cNvPr id="5" name="Text Placeholder 4"/>
-          <p:cNvSpPr>
-            <a:spLocks noGrp="1"/>
-          </p:cNvSpPr>
-          <p:nvPr>
-            <p:ph type="body" idx="14" sz="quarter"/>
+          <a:p/>
+        </p:txBody>
+      </p:sp>
+      <p:sp>
+        <p:nvSpPr>
+          <p:cNvPr id="5" name="Content Placeholder 4"/>
+          <p:cNvSpPr>
+            <a:spLocks noGrp="1"/>
+          </p:cNvSpPr>
+          <p:nvPr>
+            <p:ph idx="20" sz="quarter"/>
           </p:nvPr>
         </p:nvSpPr>
         <p:spPr/>
         <p:txBody>
           <a:bodyPr/>
           <a:lstStyle/>
-          <a:p>
-            <a:pPr>
-              <a:spcBef>
-                <a:spcPts val="400"/>
-              </a:spcBef>
-            </a:pPr>
-            <a:r>
-              <a:rPr>
-                <a:latin typeface="Arial"/>
-              </a:rPr>
-              <a:t>UX research, security, governance</a:t>
-            </a:r>
-          </a:p>
-        </p:txBody>
-      </p:sp>
-      <p:sp>
-        <p:nvSpPr>
-          <p:cNvPr id="6" name="Text Placeholder 5"/>
-          <p:cNvSpPr>
-            <a:spLocks noGrp="1"/>
-          </p:cNvSpPr>
-          <p:nvPr>
-            <p:ph type="body" idx="15" sz="quarter"/>
+          <a:p/>
+        </p:txBody>
+      </p:sp>
+      <p:sp>
+        <p:nvSpPr>
+          <p:cNvPr id="6" name="Content Placeholder 5"/>
+          <p:cNvSpPr>
+            <a:spLocks noGrp="1"/>
+          </p:cNvSpPr>
+          <p:nvPr>
+            <p:ph idx="19" sz="quarter"/>
           </p:nvPr>
         </p:nvSpPr>
         <p:spPr/>
         <p:txBody>
           <a:bodyPr/>
           <a:lstStyle/>
-          <a:p>
-            <a:pPr>
-              <a:spcBef>
-                <a:spcPts val="400"/>
-              </a:spcBef>
-            </a:pPr>
-            <a:r>
-              <a:rPr>
-                <a:latin typeface="Arial"/>
-              </a:rPr>
-              <a:t>Blended IBM/Stable teams with NRW staff</a:t>
-            </a:r>
-          </a:p>
+          <a:p/>
         </p:txBody>
       </p:sp>
     </p:spTree>
@@ -17463,125 +17247,77 @@
           <a:lstStyle/>
           <a:p>
             <a:r>
-              <a:t>Phased Scaling &amp; Maturity Pathway</a:t>
-            </a:r>
-          </a:p>
-        </p:txBody>
-      </p:sp>
-      <p:sp>
-        <p:nvSpPr>
-          <p:cNvPr id="3" name="Text Placeholder 2"/>
-          <p:cNvSpPr>
-            <a:spLocks noGrp="1"/>
-          </p:cNvSpPr>
-          <p:nvPr>
-            <p:ph type="body" idx="12" sz="quarter"/>
+              <a:t>Phased maturity pathway</a:t>
+            </a:r>
+          </a:p>
+        </p:txBody>
+      </p:sp>
+      <p:sp>
+        <p:nvSpPr>
+          <p:cNvPr id="3" name="Content Placeholder 2"/>
+          <p:cNvSpPr>
+            <a:spLocks noGrp="1"/>
+          </p:cNvSpPr>
+          <p:nvPr>
+            <p:ph idx="17" sz="quarter"/>
           </p:nvPr>
         </p:nvSpPr>
         <p:spPr/>
         <p:txBody>
           <a:bodyPr/>
           <a:lstStyle/>
-          <a:p>
-            <a:pPr>
-              <a:spcBef>
-                <a:spcPts val="400"/>
-              </a:spcBef>
-            </a:pPr>
-            <a:r>
-              <a:rPr>
-                <a:latin typeface="Arial"/>
-              </a:rPr>
-              <a:t>Alpha (Pilot): validate assumptions with pilot teams</a:t>
-            </a:r>
-          </a:p>
-        </p:txBody>
-      </p:sp>
-      <p:sp>
-        <p:nvSpPr>
-          <p:cNvPr id="4" name="Text Placeholder 3"/>
-          <p:cNvSpPr>
-            <a:spLocks noGrp="1"/>
-          </p:cNvSpPr>
-          <p:nvPr>
-            <p:ph type="body" idx="13" sz="quarter"/>
+          <a:p/>
+        </p:txBody>
+      </p:sp>
+      <p:sp>
+        <p:nvSpPr>
+          <p:cNvPr id="4" name="Content Placeholder 3"/>
+          <p:cNvSpPr>
+            <a:spLocks noGrp="1"/>
+          </p:cNvSpPr>
+          <p:nvPr>
+            <p:ph idx="18" sz="quarter"/>
           </p:nvPr>
         </p:nvSpPr>
         <p:spPr/>
         <p:txBody>
           <a:bodyPr/>
           <a:lstStyle/>
-          <a:p>
-            <a:pPr>
-              <a:spcBef>
-                <a:spcPts val="400"/>
-              </a:spcBef>
-            </a:pPr>
-            <a:r>
-              <a:rPr>
-                <a:latin typeface="Arial"/>
-              </a:rPr>
-              <a:t>Beta (Expand): scale capabilities via frequent iterations</a:t>
-            </a:r>
-          </a:p>
-        </p:txBody>
-      </p:sp>
-      <p:sp>
-        <p:nvSpPr>
-          <p:cNvPr id="5" name="Text Placeholder 4"/>
-          <p:cNvSpPr>
-            <a:spLocks noGrp="1"/>
-          </p:cNvSpPr>
-          <p:nvPr>
-            <p:ph type="body" idx="14" sz="quarter"/>
+          <a:p/>
+        </p:txBody>
+      </p:sp>
+      <p:sp>
+        <p:nvSpPr>
+          <p:cNvPr id="5" name="Content Placeholder 4"/>
+          <p:cNvSpPr>
+            <a:spLocks noGrp="1"/>
+          </p:cNvSpPr>
+          <p:nvPr>
+            <p:ph idx="20" sz="quarter"/>
           </p:nvPr>
         </p:nvSpPr>
         <p:spPr/>
         <p:txBody>
           <a:bodyPr/>
           <a:lstStyle/>
-          <a:p>
-            <a:pPr>
-              <a:spcBef>
-                <a:spcPts val="400"/>
-              </a:spcBef>
-            </a:pPr>
-            <a:r>
-              <a:rPr>
-                <a:latin typeface="Arial"/>
-              </a:rPr>
-              <a:t>Live (Operate): sustainable mix, maintenance, and operations</a:t>
-            </a:r>
-          </a:p>
-        </p:txBody>
-      </p:sp>
-      <p:sp>
-        <p:nvSpPr>
-          <p:cNvPr id="6" name="Text Placeholder 5"/>
-          <p:cNvSpPr>
-            <a:spLocks noGrp="1"/>
-          </p:cNvSpPr>
-          <p:nvPr>
-            <p:ph type="body" idx="15" sz="quarter"/>
+          <a:p/>
+        </p:txBody>
+      </p:sp>
+      <p:sp>
+        <p:nvSpPr>
+          <p:cNvPr id="6" name="Content Placeholder 5"/>
+          <p:cNvSpPr>
+            <a:spLocks noGrp="1"/>
+          </p:cNvSpPr>
+          <p:nvPr>
+            <p:ph idx="19" sz="quarter"/>
           </p:nvPr>
         </p:nvSpPr>
         <p:spPr/>
         <p:txBody>
           <a:bodyPr/>
           <a:lstStyle/>
-          <a:p>
-            <a:pPr>
-              <a:spcBef>
-                <a:spcPts val="400"/>
-              </a:spcBef>
-            </a:pPr>
-            <a:r>
-              <a:rPr>
-                <a:latin typeface="Arial"/>
-              </a:rPr>
-              <a:t>Retire (Transition): decommission with user engagement</a:t>
-            </a:r>
-          </a:p>
+          <a:p/>
         </p:txBody>
       </p:sp>
     </p:spTree>
@@ -17648,7 +17384,7 @@
               <a:rPr>
                 <a:latin typeface="Arial"/>
               </a:rPr>
-              <a:t>Embed security, privacy &amp; compliance from day one</a:t>
+              <a:t>Security, privacy &amp; compliance built in from day one</a:t>
             </a:r>
           </a:p>
           <a:p>
@@ -17662,7 +17398,7 @@
               <a:rPr>
                 <a:latin typeface="Arial"/>
               </a:rPr>
-              <a:t>Run structured threat modelling &amp; compliance analysis</a:t>
+              <a:t>Threat modelling and compliance analysis by design</a:t>
             </a:r>
           </a:p>
           <a:p>
@@ -17676,25 +17412,9 @@
               <a:rPr>
                 <a:latin typeface="Arial"/>
               </a:rPr>
-              <a:t>Use proportionate, risk-based testing &amp; assurance</a:t>
-            </a:r>
-          </a:p>
-        </p:txBody>
-      </p:sp>
-      <p:sp>
-        <p:nvSpPr>
-          <p:cNvPr id="4" name="Text Placeholder 3"/>
-          <p:cNvSpPr>
-            <a:spLocks noGrp="1"/>
-          </p:cNvSpPr>
-          <p:nvPr>
-            <p:ph type="body" idx="12" sz="quarter"/>
-          </p:nvPr>
-        </p:nvSpPr>
-        <p:spPr/>
-        <p:txBody>
-          <a:bodyPr/>
-          <a:lstStyle/>
+              <a:t>Risk-based testing with proportionate assurance</a:t>
+            </a:r>
+          </a:p>
           <a:p>
             <a:pPr>
               <a:spcBef>
@@ -17706,9 +17426,25 @@
               <a:rPr>
                 <a:latin typeface="Arial"/>
               </a:rPr>
-              <a:t>Align to UK GDPR and Cyber Essentials Plus</a:t>
-            </a:r>
-          </a:p>
+              <a:t>Operability for live services, not an afterthought</a:t>
+            </a:r>
+          </a:p>
+        </p:txBody>
+      </p:sp>
+      <p:sp>
+        <p:nvSpPr>
+          <p:cNvPr id="4" name="Text Placeholder 3"/>
+          <p:cNvSpPr>
+            <a:spLocks noGrp="1"/>
+          </p:cNvSpPr>
+          <p:nvPr>
+            <p:ph type="body" idx="12" sz="quarter"/>
+          </p:nvPr>
+        </p:nvSpPr>
+        <p:spPr/>
+        <p:txBody>
+          <a:bodyPr/>
+          <a:lstStyle/>
           <a:p>
             <a:pPr>
               <a:spcBef>
@@ -17720,7 +17456,7 @@
               <a:rPr>
                 <a:latin typeface="Arial"/>
               </a:rPr>
-              <a:t>Increase assurance for high-risk components</a:t>
+              <a:t>UK GDPR + Cyber Essentials Plus alignment</a:t>
             </a:r>
           </a:p>
           <a:p>
@@ -17734,7 +17470,35 @@
               <a:rPr>
                 <a:latin typeface="Arial"/>
               </a:rPr>
-              <a:t>Enable continuous monitoring and resilience</a:t>
+              <a:t>Extra assurance for high-risk components</a:t>
+            </a:r>
+          </a:p>
+          <a:p>
+            <a:pPr>
+              <a:spcBef>
+                <a:spcPts val="400"/>
+              </a:spcBef>
+              <a:buChar char="•"/>
+            </a:pPr>
+            <a:r>
+              <a:rPr>
+                <a:latin typeface="Arial"/>
+              </a:rPr>
+              <a:t>Continuous monitoring and resilience engineering</a:t>
+            </a:r>
+          </a:p>
+          <a:p>
+            <a:pPr>
+              <a:spcBef>
+                <a:spcPts val="400"/>
+              </a:spcBef>
+              <a:buChar char="•"/>
+            </a:pPr>
+            <a:r>
+              <a:rPr>
+                <a:latin typeface="Arial"/>
+              </a:rPr>
+              <a:t>Knowledge transfer for NRW ownership readiness</a:t>
             </a:r>
           </a:p>
         </p:txBody>
@@ -17812,7 +17576,7 @@
           <a:lstStyle/>
           <a:p>
             <a:r>
-              <a:t>12-week innovation window: test, validate, and scale what works</a:t>
+              <a:t>12-week innovation window</a:t>
             </a:r>
           </a:p>
         </p:txBody>
@@ -17851,125 +17615,77 @@
           <a:lstStyle/>
           <a:p>
             <a:r>
-              <a:t>Three innovation modes for website improvement</a:t>
-            </a:r>
-          </a:p>
-        </p:txBody>
-      </p:sp>
-      <p:sp>
-        <p:nvSpPr>
-          <p:cNvPr id="3" name="Text Placeholder 2"/>
-          <p:cNvSpPr>
-            <a:spLocks noGrp="1"/>
-          </p:cNvSpPr>
-          <p:nvPr>
-            <p:ph type="body" idx="12" sz="quarter"/>
+              <a:t>Innovation modes for website improvement</a:t>
+            </a:r>
+          </a:p>
+        </p:txBody>
+      </p:sp>
+      <p:sp>
+        <p:nvSpPr>
+          <p:cNvPr id="3" name="Content Placeholder 2"/>
+          <p:cNvSpPr>
+            <a:spLocks noGrp="1"/>
+          </p:cNvSpPr>
+          <p:nvPr>
+            <p:ph idx="17" sz="quarter"/>
           </p:nvPr>
         </p:nvSpPr>
         <p:spPr/>
         <p:txBody>
           <a:bodyPr/>
           <a:lstStyle/>
-          <a:p>
-            <a:pPr>
-              <a:spcBef>
-                <a:spcPts val="400"/>
-              </a:spcBef>
-            </a:pPr>
-            <a:r>
-              <a:rPr>
-                <a:latin typeface="Arial"/>
-              </a:rPr>
-              <a:t>Discovery-led: identify viable opportunities</a:t>
-            </a:r>
-          </a:p>
-        </p:txBody>
-      </p:sp>
-      <p:sp>
-        <p:nvSpPr>
-          <p:cNvPr id="4" name="Text Placeholder 3"/>
-          <p:cNvSpPr>
-            <a:spLocks noGrp="1"/>
-          </p:cNvSpPr>
-          <p:nvPr>
-            <p:ph type="body" idx="13" sz="quarter"/>
+          <a:p/>
+        </p:txBody>
+      </p:sp>
+      <p:sp>
+        <p:nvSpPr>
+          <p:cNvPr id="4" name="Content Placeholder 3"/>
+          <p:cNvSpPr>
+            <a:spLocks noGrp="1"/>
+          </p:cNvSpPr>
+          <p:nvPr>
+            <p:ph idx="18" sz="quarter"/>
           </p:nvPr>
         </p:nvSpPr>
         <p:spPr/>
         <p:txBody>
           <a:bodyPr/>
           <a:lstStyle/>
-          <a:p>
-            <a:pPr>
-              <a:spcBef>
-                <a:spcPts val="400"/>
-              </a:spcBef>
-            </a:pPr>
-            <a:r>
-              <a:rPr>
-                <a:latin typeface="Arial"/>
-              </a:rPr>
-              <a:t>Proof-led: validate defined ideas</a:t>
-            </a:r>
-          </a:p>
-        </p:txBody>
-      </p:sp>
-      <p:sp>
-        <p:nvSpPr>
-          <p:cNvPr id="5" name="Text Placeholder 4"/>
-          <p:cNvSpPr>
-            <a:spLocks noGrp="1"/>
-          </p:cNvSpPr>
-          <p:nvPr>
-            <p:ph type="body" idx="14" sz="quarter"/>
+          <a:p/>
+        </p:txBody>
+      </p:sp>
+      <p:sp>
+        <p:nvSpPr>
+          <p:cNvPr id="5" name="Content Placeholder 4"/>
+          <p:cNvSpPr>
+            <a:spLocks noGrp="1"/>
+          </p:cNvSpPr>
+          <p:nvPr>
+            <p:ph idx="20" sz="quarter"/>
           </p:nvPr>
         </p:nvSpPr>
         <p:spPr/>
         <p:txBody>
           <a:bodyPr/>
           <a:lstStyle/>
-          <a:p>
-            <a:pPr>
-              <a:spcBef>
-                <a:spcPts val="400"/>
-              </a:spcBef>
-            </a:pPr>
-            <a:r>
-              <a:rPr>
-                <a:latin typeface="Arial"/>
-              </a:rPr>
-              <a:t>Optimisation-led: improve known pain points</a:t>
-            </a:r>
-          </a:p>
-        </p:txBody>
-      </p:sp>
-      <p:sp>
-        <p:nvSpPr>
-          <p:cNvPr id="6" name="Text Placeholder 5"/>
-          <p:cNvSpPr>
-            <a:spLocks noGrp="1"/>
-          </p:cNvSpPr>
-          <p:nvPr>
-            <p:ph type="body" idx="15" sz="quarter"/>
+          <a:p/>
+        </p:txBody>
+      </p:sp>
+      <p:sp>
+        <p:nvSpPr>
+          <p:cNvPr id="6" name="Content Placeholder 5"/>
+          <p:cNvSpPr>
+            <a:spLocks noGrp="1"/>
+          </p:cNvSpPr>
+          <p:nvPr>
+            <p:ph idx="19" sz="quarter"/>
           </p:nvPr>
         </p:nvSpPr>
         <p:spPr/>
         <p:txBody>
           <a:bodyPr/>
           <a:lstStyle/>
-          <a:p>
-            <a:pPr>
-              <a:spcBef>
-                <a:spcPts val="400"/>
-              </a:spcBef>
-            </a:pPr>
-            <a:r>
-              <a:rPr>
-                <a:latin typeface="Arial"/>
-              </a:rPr>
-              <a:t>Rapid learning and evidence-driven decisions</a:t>
-            </a:r>
-          </a:p>
+          <a:p/>
         </p:txBody>
       </p:sp>
     </p:spTree>
@@ -18006,125 +17722,77 @@
           <a:lstStyle/>
           <a:p>
             <a:r>
-              <a:t>Four phases to generate evidence and drive decisions</a:t>
-            </a:r>
-          </a:p>
-        </p:txBody>
-      </p:sp>
-      <p:sp>
-        <p:nvSpPr>
-          <p:cNvPr id="3" name="Text Placeholder 2"/>
-          <p:cNvSpPr>
-            <a:spLocks noGrp="1"/>
-          </p:cNvSpPr>
-          <p:nvPr>
-            <p:ph type="body" idx="12" sz="quarter"/>
+              <a:t>Evidence generation: four phases</a:t>
+            </a:r>
+          </a:p>
+        </p:txBody>
+      </p:sp>
+      <p:sp>
+        <p:nvSpPr>
+          <p:cNvPr id="3" name="Content Placeholder 2"/>
+          <p:cNvSpPr>
+            <a:spLocks noGrp="1"/>
+          </p:cNvSpPr>
+          <p:nvPr>
+            <p:ph idx="17" sz="quarter"/>
           </p:nvPr>
         </p:nvSpPr>
         <p:spPr/>
         <p:txBody>
           <a:bodyPr/>
           <a:lstStyle/>
-          <a:p>
-            <a:pPr>
-              <a:spcBef>
-                <a:spcPts val="400"/>
-              </a:spcBef>
-            </a:pPr>
-            <a:r>
-              <a:rPr>
-                <a:latin typeface="Arial"/>
-              </a:rPr>
-              <a:t>Explore &amp; Discover: define hypotheses and success signals</a:t>
-            </a:r>
-          </a:p>
-        </p:txBody>
-      </p:sp>
-      <p:sp>
-        <p:nvSpPr>
-          <p:cNvPr id="4" name="Text Placeholder 3"/>
-          <p:cNvSpPr>
-            <a:spLocks noGrp="1"/>
-          </p:cNvSpPr>
-          <p:nvPr>
-            <p:ph type="body" idx="13" sz="quarter"/>
+          <a:p/>
+        </p:txBody>
+      </p:sp>
+      <p:sp>
+        <p:nvSpPr>
+          <p:cNvPr id="4" name="Content Placeholder 3"/>
+          <p:cNvSpPr>
+            <a:spLocks noGrp="1"/>
+          </p:cNvSpPr>
+          <p:nvPr>
+            <p:ph idx="18" sz="quarter"/>
           </p:nvPr>
         </p:nvSpPr>
         <p:spPr/>
         <p:txBody>
           <a:bodyPr/>
           <a:lstStyle/>
-          <a:p>
-            <a:pPr>
-              <a:spcBef>
-                <a:spcPts val="400"/>
-              </a:spcBef>
-            </a:pPr>
-            <a:r>
-              <a:rPr>
-                <a:latin typeface="Arial"/>
-              </a:rPr>
-              <a:t>Ideate/Co-create: run low-cost experiments to learn fast</a:t>
-            </a:r>
-          </a:p>
-        </p:txBody>
-      </p:sp>
-      <p:sp>
-        <p:nvSpPr>
-          <p:cNvPr id="5" name="Text Placeholder 4"/>
-          <p:cNvSpPr>
-            <a:spLocks noGrp="1"/>
-          </p:cNvSpPr>
-          <p:nvPr>
-            <p:ph type="body" idx="14" sz="quarter"/>
+          <a:p/>
+        </p:txBody>
+      </p:sp>
+      <p:sp>
+        <p:nvSpPr>
+          <p:cNvPr id="5" name="Content Placeholder 4"/>
+          <p:cNvSpPr>
+            <a:spLocks noGrp="1"/>
+          </p:cNvSpPr>
+          <p:nvPr>
+            <p:ph idx="20" sz="quarter"/>
           </p:nvPr>
         </p:nvSpPr>
         <p:spPr/>
         <p:txBody>
           <a:bodyPr/>
           <a:lstStyle/>
-          <a:p>
-            <a:pPr>
-              <a:spcBef>
-                <a:spcPts val="400"/>
-              </a:spcBef>
-            </a:pPr>
-            <a:r>
-              <a:rPr>
-                <a:latin typeface="Arial"/>
-              </a:rPr>
-              <a:t>Design &amp; Build/Co-execute: deepen prototypes with evidence</a:t>
-            </a:r>
-          </a:p>
-        </p:txBody>
-      </p:sp>
-      <p:sp>
-        <p:nvSpPr>
-          <p:cNvPr id="6" name="Text Placeholder 5"/>
-          <p:cNvSpPr>
-            <a:spLocks noGrp="1"/>
-          </p:cNvSpPr>
-          <p:nvPr>
-            <p:ph type="body" idx="15" sz="quarter"/>
+          <a:p/>
+        </p:txBody>
+      </p:sp>
+      <p:sp>
+        <p:nvSpPr>
+          <p:cNvPr id="6" name="Content Placeholder 5"/>
+          <p:cNvSpPr>
+            <a:spLocks noGrp="1"/>
+          </p:cNvSpPr>
+          <p:nvPr>
+            <p:ph idx="19" sz="quarter"/>
           </p:nvPr>
         </p:nvSpPr>
         <p:spPr/>
         <p:txBody>
           <a:bodyPr/>
           <a:lstStyle/>
-          <a:p>
-            <a:pPr>
-              <a:spcBef>
-                <a:spcPts val="400"/>
-              </a:spcBef>
-            </a:pPr>
-            <a:r>
-              <a:rPr>
-                <a:latin typeface="Arial"/>
-              </a:rPr>
-              <a:t>Scale/Co-operate: consolidate results and decide next steps</a:t>
-            </a:r>
-          </a:p>
+          <a:p/>
         </p:txBody>
       </p:sp>
     </p:spTree>
@@ -18161,7 +17829,7 @@
           <a:lstStyle/>
           <a:p>
             <a:r>
-              <a:t>Evidence-led hypotheses with decision-ready success criteria</a:t>
+              <a:t>Evidence-based success criteria for hypothesis testing</a:t>
             </a:r>
           </a:p>
         </p:txBody>
@@ -18191,7 +17859,7 @@
               <a:rPr>
                 <a:latin typeface="Arial"/>
               </a:rPr>
-              <a:t>Tie hypotheses to user problems</a:t>
+              <a:t>Hypotheses tied to user problems and outcomes</a:t>
             </a:r>
           </a:p>
           <a:p>
@@ -18205,7 +17873,7 @@
               <a:rPr>
                 <a:latin typeface="Arial"/>
               </a:rPr>
-              <a:t>Design lightweight experiments</a:t>
+              <a:t>Lightweight experiments with clear success signals</a:t>
             </a:r>
           </a:p>
           <a:p>
@@ -18219,7 +17887,7 @@
               <a:rPr>
                 <a:latin typeface="Arial"/>
               </a:rPr>
-              <a:t>Run controlled tests and collect evidence</a:t>
+              <a:t>Controlled tests to generate reliable evidence</a:t>
             </a:r>
           </a:p>
           <a:p>
@@ -18233,7 +17901,7 @@
               <a:rPr>
                 <a:latin typeface="Arial"/>
               </a:rPr>
-              <a:t>Stakeholders review and decide</a:t>
+              <a:t>Stakeholder review to decide scale or stop</a:t>
             </a:r>
           </a:p>
         </p:txBody>
@@ -18344,7 +18012,7 @@
           <a:lstStyle/>
           <a:p>
             <a:r>
-              <a:t>Innovation window: decision-ready deliverables</a:t>
+              <a:t>Innovation window: validated outputs</a:t>
             </a:r>
           </a:p>
         </p:txBody>
@@ -18374,7 +18042,7 @@
               <a:rPr>
                 <a:latin typeface="Arial"/>
               </a:rPr>
-              <a:t>Validated hypotheses and reusable design patterns</a:t>
+              <a:t>Reusable design patterns and validated hypotheses</a:t>
             </a:r>
           </a:p>
           <a:p>
@@ -18388,7 +18056,7 @@
               <a:rPr>
                 <a:latin typeface="Arial"/>
               </a:rPr>
-              <a:t>Navigation and information architecture prototypes</a:t>
+              <a:t>Navigation &amp; information architecture prototypes</a:t>
             </a:r>
           </a:p>
           <a:p>
@@ -18430,7 +18098,7 @@
               <a:rPr>
                 <a:latin typeface="Arial"/>
               </a:rPr>
-              <a:t>Accessibility and content improvement backlog</a:t>
+              <a:t>Accessibility &amp; content backlog with feasibility proof</a:t>
             </a:r>
           </a:p>
           <a:p>
@@ -18444,21 +18112,7 @@
               <a:rPr>
                 <a:latin typeface="Arial"/>
               </a:rPr>
-              <a:t>Proof of feasibility for live data integration</a:t>
-            </a:r>
-          </a:p>
-          <a:p>
-            <a:pPr>
-              <a:spcBef>
-                <a:spcPts val="400"/>
-              </a:spcBef>
-              <a:buChar char="•"/>
-            </a:pPr>
-            <a:r>
-              <a:rPr>
-                <a:latin typeface="Arial"/>
-              </a:rPr>
-              <a:t>Measurement framework for success metrics</a:t>
+              <a:t>Live data integration feasibility and measurement framework</a:t>
             </a:r>
           </a:p>
         </p:txBody>
@@ -18497,7 +18151,7 @@
           <a:lstStyle/>
           <a:p>
             <a:r>
-              <a:t>Section 1: Our Joint Proposition</a:t>
+              <a:t>Section 1: Joint Proposition</a:t>
             </a:r>
           </a:p>
         </p:txBody>
@@ -18536,7 +18190,7 @@
           <a:lstStyle/>
           <a:p>
             <a:r>
-              <a:t>Risks, dependencies, and assumptions</a:t>
+              <a:t>Key risks, dependencies, and assumptions</a:t>
             </a:r>
           </a:p>
         </p:txBody>
@@ -18638,7 +18292,7 @@
               <a:rPr>
                 <a:latin typeface="Arial"/>
               </a:rPr>
-              <a:t>Stakeholder engagement required</a:t>
+              <a:t>Stakeholder engagement needed</a:t>
             </a:r>
           </a:p>
           <a:p>
@@ -18666,7 +18320,7 @@
               <a:rPr>
                 <a:latin typeface="Arial"/>
               </a:rPr>
-              <a:t>Test feasibility before scaling</a:t>
+              <a:t>Engage users upfront</a:t>
             </a:r>
           </a:p>
           <a:p>
@@ -18680,7 +18334,7 @@
               <a:rPr>
                 <a:latin typeface="Arial"/>
               </a:rPr>
-              <a:t>Measure, report, iterate</a:t>
+              <a:t>Measure, report, and learn</a:t>
             </a:r>
           </a:p>
         </p:txBody>
@@ -18758,125 +18412,77 @@
           <a:lstStyle/>
           <a:p>
             <a:r>
-              <a:t>Embedding sustainability and social value in delivery</a:t>
-            </a:r>
-          </a:p>
-        </p:txBody>
-      </p:sp>
-      <p:sp>
-        <p:nvSpPr>
-          <p:cNvPr id="3" name="Text Placeholder 2"/>
-          <p:cNvSpPr>
-            <a:spLocks noGrp="1"/>
-          </p:cNvSpPr>
-          <p:nvPr>
-            <p:ph type="body" idx="12" sz="quarter"/>
+              <a:t>Delivery sustainability &amp; social value</a:t>
+            </a:r>
+          </a:p>
+        </p:txBody>
+      </p:sp>
+      <p:sp>
+        <p:nvSpPr>
+          <p:cNvPr id="3" name="Content Placeholder 2"/>
+          <p:cNvSpPr>
+            <a:spLocks noGrp="1"/>
+          </p:cNvSpPr>
+          <p:nvPr>
+            <p:ph idx="17" sz="quarter"/>
           </p:nvPr>
         </p:nvSpPr>
         <p:spPr/>
         <p:txBody>
           <a:bodyPr/>
           <a:lstStyle/>
-          <a:p>
-            <a:pPr>
-              <a:spcBef>
-                <a:spcPts val="400"/>
-              </a:spcBef>
-            </a:pPr>
-            <a:r>
-              <a:rPr>
-                <a:latin typeface="Arial"/>
-              </a:rPr>
-              <a:t>Environmental impact reduction via cloud platforms</a:t>
-            </a:r>
-          </a:p>
-        </p:txBody>
-      </p:sp>
-      <p:sp>
-        <p:nvSpPr>
-          <p:cNvPr id="4" name="Text Placeholder 3"/>
-          <p:cNvSpPr>
-            <a:spLocks noGrp="1"/>
-          </p:cNvSpPr>
-          <p:nvPr>
-            <p:ph type="body" idx="13" sz="quarter"/>
+          <a:p/>
+        </p:txBody>
+      </p:sp>
+      <p:sp>
+        <p:nvSpPr>
+          <p:cNvPr id="4" name="Content Placeholder 3"/>
+          <p:cNvSpPr>
+            <a:spLocks noGrp="1"/>
+          </p:cNvSpPr>
+          <p:nvPr>
+            <p:ph idx="18" sz="quarter"/>
           </p:nvPr>
         </p:nvSpPr>
         <p:spPr/>
         <p:txBody>
           <a:bodyPr/>
           <a:lstStyle/>
-          <a:p>
-            <a:pPr>
-              <a:spcBef>
-                <a:spcPts val="400"/>
-              </a:spcBef>
-            </a:pPr>
-            <a:r>
-              <a:rPr>
-                <a:latin typeface="Arial"/>
-              </a:rPr>
-              <a:t>FinOps and GreenOps for cost and carbon visibility</a:t>
-            </a:r>
-          </a:p>
-        </p:txBody>
-      </p:sp>
-      <p:sp>
-        <p:nvSpPr>
-          <p:cNvPr id="5" name="Text Placeholder 4"/>
-          <p:cNvSpPr>
-            <a:spLocks noGrp="1"/>
-          </p:cNvSpPr>
-          <p:nvPr>
-            <p:ph type="body" idx="14" sz="quarter"/>
+          <a:p/>
+        </p:txBody>
+      </p:sp>
+      <p:sp>
+        <p:nvSpPr>
+          <p:cNvPr id="5" name="Content Placeholder 4"/>
+          <p:cNvSpPr>
+            <a:spLocks noGrp="1"/>
+          </p:cNvSpPr>
+          <p:nvPr>
+            <p:ph idx="20" sz="quarter"/>
           </p:nvPr>
         </p:nvSpPr>
         <p:spPr/>
         <p:txBody>
           <a:bodyPr/>
           <a:lstStyle/>
-          <a:p>
-            <a:pPr>
-              <a:spcBef>
-                <a:spcPts val="400"/>
-              </a:spcBef>
-            </a:pPr>
-            <a:r>
-              <a:rPr>
-                <a:latin typeface="Arial"/>
-              </a:rPr>
-              <a:t>Local employment and skills development</a:t>
-            </a:r>
-          </a:p>
-        </p:txBody>
-      </p:sp>
-      <p:sp>
-        <p:nvSpPr>
-          <p:cNvPr id="6" name="Text Placeholder 5"/>
-          <p:cNvSpPr>
-            <a:spLocks noGrp="1"/>
-          </p:cNvSpPr>
-          <p:nvPr>
-            <p:ph type="body" idx="15" sz="quarter"/>
+          <a:p/>
+        </p:txBody>
+      </p:sp>
+      <p:sp>
+        <p:nvSpPr>
+          <p:cNvPr id="6" name="Content Placeholder 5"/>
+          <p:cNvSpPr>
+            <a:spLocks noGrp="1"/>
+          </p:cNvSpPr>
+          <p:nvPr>
+            <p:ph idx="19" sz="quarter"/>
           </p:nvPr>
         </p:nvSpPr>
         <p:spPr/>
         <p:txBody>
           <a:bodyPr/>
           <a:lstStyle/>
-          <a:p>
-            <a:pPr>
-              <a:spcBef>
-                <a:spcPts val="400"/>
-              </a:spcBef>
-            </a:pPr>
-            <a:r>
-              <a:rPr>
-                <a:latin typeface="Arial"/>
-              </a:rPr>
-              <a:t>Welsh SME and social enterprise engagement</a:t>
-            </a:r>
-          </a:p>
+          <a:p/>
         </p:txBody>
       </p:sp>
     </p:spTree>
@@ -18913,7 +18519,7 @@
           <a:lstStyle/>
           <a:p>
             <a:r>
-              <a:t>Stable’s social value impact in Wales</a:t>
+              <a:t>Social Value Impact in Wales</a:t>
             </a:r>
           </a:p>
         </p:txBody>
@@ -18943,7 +18549,7 @@
               <a:rPr>
                 <a:latin typeface="Arial"/>
               </a:rPr>
-              <a:t>Welsh-based teams supporting local employment</a:t>
+              <a:t>Local employment with Welsh-based teams</a:t>
             </a:r>
           </a:p>
           <a:p>
@@ -18957,7 +18563,7 @@
               <a:rPr>
                 <a:latin typeface="Arial"/>
               </a:rPr>
-              <a:t>Internship pathways with local universities</a:t>
+              <a:t>Internships with local universities</a:t>
             </a:r>
           </a:p>
           <a:p>
@@ -18971,7 +18577,7 @@
               <a:rPr>
                 <a:latin typeface="Arial"/>
               </a:rPr>
-              <a:t>Community engagement with charities</a:t>
+              <a:t>Charity partnerships and community engagement</a:t>
             </a:r>
           </a:p>
           <a:p>
@@ -19015,7 +18621,7 @@
               <a:rPr>
                 <a:latin typeface="Arial"/>
               </a:rPr>
-              <a:t>Partnerships with Welsh SMEs and social enterprises</a:t>
+              <a:t>Welsh SME and social enterprise partnerships</a:t>
             </a:r>
           </a:p>
           <a:p>
@@ -19043,7 +18649,7 @@
               <a:rPr>
                 <a:latin typeface="Arial"/>
               </a:rPr>
-              <a:t>Digital skills promotion in schools</a:t>
+              <a:t>Digital skills in schools</a:t>
             </a:r>
           </a:p>
           <a:p>
@@ -19057,7 +18663,7 @@
               <a:rPr>
                 <a:latin typeface="Arial"/>
               </a:rPr>
-              <a:t>Structured reporting and measurable outcomes</a:t>
+              <a:t>Transparent reporting and measurable outcomes</a:t>
             </a:r>
           </a:p>
         </p:txBody>
@@ -19096,7 +18702,7 @@
           <a:lstStyle/>
           <a:p>
             <a:r>
-              <a:t>Monitoring sustainability &amp; social value performance</a:t>
+              <a:t>Sustainability &amp; social value performance monitoring</a:t>
             </a:r>
           </a:p>
         </p:txBody>
@@ -19126,7 +18732,7 @@
               <a:rPr>
                 <a:latin typeface="Arial"/>
               </a:rPr>
-              <a:t>KPIs: carbon impact, supplier participation, skills uplift</a:t>
+              <a:t>Track KPIs: carbon impact, supplier participation, skills uplift</a:t>
             </a:r>
           </a:p>
           <a:p>
@@ -19140,7 +18746,7 @@
               <a:rPr>
                 <a:latin typeface="Arial"/>
               </a:rPr>
-              <a:t>Structured reporting aligned to governance framework</a:t>
+              <a:t>Structured reporting aligned to the governance framework</a:t>
             </a:r>
           </a:p>
           <a:p>
@@ -19154,7 +18760,7 @@
               <a:rPr>
                 <a:latin typeface="Arial"/>
               </a:rPr>
-              <a:t>Commitments scaled to engagement size</a:t>
+              <a:t>Scale commitments to engagement size for lasting impact</a:t>
             </a:r>
           </a:p>
           <a:p>
@@ -19207,7 +18813,7 @@
           <a:lstStyle/>
           <a:p>
             <a:r>
-              <a:t>Section 6: Commercial Approach</a:t>
+              <a:t>Commercial Approach</a:t>
             </a:r>
           </a:p>
         </p:txBody>
@@ -19304,9 +18910,25 @@
               <a:rPr>
                 <a:latin typeface="Arial"/>
               </a:rPr>
-              <a:t>Fixed Capacity: balance agility and cost certainty</a:t>
-            </a:r>
-          </a:p>
+              <a:t>Fixed Capacity: balanced agility and cost certainty</a:t>
+            </a:r>
+          </a:p>
+        </p:txBody>
+      </p:sp>
+      <p:sp>
+        <p:nvSpPr>
+          <p:cNvPr id="4" name="Text Placeholder 3"/>
+          <p:cNvSpPr>
+            <a:spLocks noGrp="1"/>
+          </p:cNvSpPr>
+          <p:nvPr>
+            <p:ph type="body" idx="12" sz="quarter"/>
+          </p:nvPr>
+        </p:nvSpPr>
+        <p:spPr/>
+        <p:txBody>
+          <a:bodyPr/>
+          <a:lstStyle/>
           <a:p>
             <a:pPr>
               <a:spcBef>
@@ -19318,25 +18940,9 @@
               <a:rPr>
                 <a:latin typeface="Arial"/>
               </a:rPr>
-              <a:t>Selected by requirement certainty and delivery needs</a:t>
-            </a:r>
-          </a:p>
-        </p:txBody>
-      </p:sp>
-      <p:sp>
-        <p:nvSpPr>
-          <p:cNvPr id="4" name="Text Placeholder 3"/>
-          <p:cNvSpPr>
-            <a:spLocks noGrp="1"/>
-          </p:cNvSpPr>
-          <p:nvPr>
-            <p:ph type="body" idx="12" sz="quarter"/>
-          </p:nvPr>
-        </p:nvSpPr>
-        <p:spPr/>
-        <p:txBody>
-          <a:bodyPr/>
-          <a:lstStyle/>
+              <a:t>Supplier-led: managed platforms and operational services</a:t>
+            </a:r>
+          </a:p>
           <a:p>
             <a:pPr>
               <a:spcBef>
@@ -19348,49 +18954,7 @@
               <a:rPr>
                 <a:latin typeface="Arial"/>
               </a:rPr>
-              <a:t>Supplier-led: managed platforms and operational services</a:t>
-            </a:r>
-          </a:p>
-          <a:p>
-            <a:pPr>
-              <a:spcBef>
-                <a:spcPts val="400"/>
-              </a:spcBef>
-              <a:buChar char="•"/>
-            </a:pPr>
-            <a:r>
-              <a:rPr>
-                <a:latin typeface="Arial"/>
-              </a:rPr>
               <a:t>Blended delivery: buyer and supplier teams</a:t>
-            </a:r>
-          </a:p>
-          <a:p>
-            <a:pPr>
-              <a:spcBef>
-                <a:spcPts val="400"/>
-              </a:spcBef>
-              <a:buChar char="•"/>
-            </a:pPr>
-            <a:r>
-              <a:rPr>
-                <a:latin typeface="Arial"/>
-              </a:rPr>
-              <a:t>Selected by risk and transparency requirements</a:t>
-            </a:r>
-          </a:p>
-          <a:p>
-            <a:pPr>
-              <a:spcBef>
-                <a:spcPts val="400"/>
-              </a:spcBef>
-              <a:buChar char="•"/>
-            </a:pPr>
-            <a:r>
-              <a:rPr>
-                <a:latin typeface="Arial"/>
-              </a:rPr>
-              <a:t>Supports flexibility without losing cost clarity</a:t>
             </a:r>
           </a:p>
         </p:txBody>
@@ -19429,7 +18993,7 @@
           <a:lstStyle/>
           <a:p>
             <a:r>
-              <a:t>Key assumptions behind rate card &amp; discounts</a:t>
+              <a:t>Rate card &amp; discount assumptions</a:t>
             </a:r>
           </a:p>
         </p:txBody>
@@ -19459,7 +19023,7 @@
               <a:rPr>
                 <a:latin typeface="Arial"/>
               </a:rPr>
-              <a:t>Standard role definitions and inclusive delivery costs</a:t>
+              <a:t>Standard role definitions + inclusive delivery costs</a:t>
             </a:r>
           </a:p>
           <a:p>
@@ -19473,7 +19037,7 @@
               <a:rPr>
                 <a:latin typeface="Arial"/>
               </a:rPr>
-              <a:t>8-hour working day in normal delivery environments</a:t>
+              <a:t>8-hour working day; normal delivery environments</a:t>
             </a:r>
           </a:p>
           <a:p>
@@ -19502,34 +19066,6 @@
                 <a:latin typeface="Arial"/>
               </a:rPr>
               <a:t>Rates refined at call-off for specialist needs</a:t>
-            </a:r>
-          </a:p>
-          <a:p>
-            <a:pPr>
-              <a:spcBef>
-                <a:spcPts val="400"/>
-              </a:spcBef>
-              <a:buChar char="•"/>
-            </a:pPr>
-            <a:r>
-              <a:rPr>
-                <a:latin typeface="Arial"/>
-              </a:rPr>
-              <a:t>Volume discounts for sustained delivery</a:t>
-            </a:r>
-          </a:p>
-          <a:p>
-            <a:pPr>
-              <a:spcBef>
-                <a:spcPts val="400"/>
-              </a:spcBef>
-              <a:buChar char="•"/>
-            </a:pPr>
-            <a:r>
-              <a:rPr>
-                <a:latin typeface="Arial"/>
-              </a:rPr>
-              <a:t>Transparent cost drivers and assumptions</a:t>
             </a:r>
           </a:p>
         </p:txBody>
@@ -19568,7 +19104,7 @@
           <a:lstStyle/>
           <a:p>
             <a:r>
-              <a:t>Innovation Fund Governance: Transparent, Fair, Impact-Driven</a:t>
+              <a:t>Innovation fund governance: fair, transparent, impact-led</a:t>
             </a:r>
           </a:p>
         </p:txBody>
@@ -19612,7 +19148,7 @@
               <a:rPr>
                 <a:latin typeface="Arial"/>
               </a:rPr>
-              <a:t>Impact-based decisions with documented rationale</a:t>
+              <a:t>Impact-based funding decisions and scoring</a:t>
             </a:r>
           </a:p>
           <a:p>
@@ -19626,7 +19162,7 @@
               <a:rPr>
                 <a:latin typeface="Arial"/>
               </a:rPr>
-              <a:t>Collaborative support for innovation proposals</a:t>
+              <a:t>Collaborative support for contributor proposals</a:t>
             </a:r>
           </a:p>
           <a:p>
@@ -19640,7 +19176,7 @@
               <a:rPr>
                 <a:latin typeface="Arial"/>
               </a:rPr>
-              <a:t>Structured participation and open outcomes</a:t>
+              <a:t>Structured participation with open outcomes</a:t>
             </a:r>
           </a:p>
         </p:txBody>
@@ -19684,7 +19220,7 @@
               <a:rPr>
                 <a:latin typeface="Arial"/>
               </a:rPr>
-              <a:t>Visible scoring criteria and decision traceability</a:t>
+              <a:t>Visible criteria, rationale, and decision trail</a:t>
             </a:r>
           </a:p>
           <a:p>
@@ -19698,7 +19234,7 @@
               <a:rPr>
                 <a:latin typeface="Arial"/>
               </a:rPr>
-              <a:t>Periodic review to adjust funding and guidance</a:t>
+              <a:t>Periodic review to adjust priorities and rules</a:t>
             </a:r>
           </a:p>
           <a:p>
@@ -19712,7 +19248,7 @@
               <a:rPr>
                 <a:latin typeface="Arial"/>
               </a:rPr>
-              <a:t>Trust-building through consistent governance cadence</a:t>
+              <a:t>Trust maintained through consistent governance cadence</a:t>
             </a:r>
           </a:p>
         </p:txBody>
@@ -19790,7 +19326,7 @@
           <a:lstStyle/>
           <a:p>
             <a:r>
-              <a:t>IBM and Stable: scale with sustainable capability</a:t>
+              <a:t>IBM and Stable: scale with local expertise</a:t>
             </a:r>
           </a:p>
         </p:txBody>
@@ -19829,7 +19365,7 @@
           <a:lstStyle/>
           <a:p>
             <a:r>
-              <a:t>Mobilise NRW and supplier discovery</a:t>
+              <a:t>Next steps: mobilise NRW and suppliers for discovery</a:t>
             </a:r>
           </a:p>
         </p:txBody>
@@ -19945,7 +19481,7 @@
               <a:rPr>
                 <a:latin typeface="Arial"/>
               </a:rPr>
-              <a:t>NRW: share system inventory and data dictionary</a:t>
+              <a:t>NRW: share system inventory &amp; data dictionary</a:t>
             </a:r>
           </a:p>
           <a:p>
@@ -19959,7 +19495,7 @@
               <a:rPr>
                 <a:latin typeface="Arial"/>
               </a:rPr>
-              <a:t>NRW: agree innovation window hypotheses</a:t>
+              <a:t>NRW: align on innovation window hypotheses</a:t>
             </a:r>
           </a:p>
           <a:p>
@@ -19973,7 +19509,7 @@
               <a:rPr>
                 <a:latin typeface="Arial"/>
               </a:rPr>
-              <a:t>NRW: review sustainability and social value KPIs</a:t>
+              <a:t>NRW: review sustainability &amp; social value KPIs</a:t>
             </a:r>
           </a:p>
         </p:txBody>
@@ -20031,79 +19567,7 @@
         <p:txBody>
           <a:bodyPr/>
           <a:lstStyle/>
-          <a:p>
-            <a:pPr>
-              <a:spcBef>
-                <a:spcPts val="400"/>
-              </a:spcBef>
-            </a:pPr>
-            <a:r>
-              <a:rPr>
-                <a:latin typeface="Arial"/>
-              </a:rPr>
-              <a:t>Follow-up</a:t>
-            </a:r>
-            <a:br/>
-            <a:br/>
-            <a:r>
-              <a:rPr>
-                <a:latin typeface="Arial"/>
-              </a:rPr>
-              <a:t>Dave Aspden (Stable CEO)</a:t>
-            </a:r>
-            <a:br/>
-            <a:r>
-              <a:rPr>
-                <a:latin typeface="Arial"/>
-              </a:rPr>
-              <a:t> dave@stable.co.uk</a:t>
-            </a:r>
-            <a:br/>
-            <a:br/>
-            <a:r>
-              <a:rPr>
-                <a:latin typeface="Arial"/>
-              </a:rPr>
-              <a:t>Phil Davenport (IBM Client Delivery Partner)</a:t>
-            </a:r>
-            <a:br/>
-            <a:r>
-              <a:rPr>
-                <a:latin typeface="Arial"/>
-              </a:rPr>
-              <a:t> philip.davenport@ibm.com</a:t>
-            </a:r>
-            <a:br/>
-            <a:br/>
-            <a:r>
-              <a:rPr>
-                <a:latin typeface="Arial"/>
-              </a:rPr>
-              <a:t>David Rowley (IBM Microsoft Practice CTO)</a:t>
-            </a:r>
-            <a:br/>
-            <a:r>
-              <a:rPr>
-                <a:latin typeface="Arial"/>
-              </a:rPr>
-              <a:t> david.rowley@ibm.com</a:t>
-            </a:r>
-            <a:br/>
-            <a:br/>
-            <a:r>
-              <a:rPr>
-                <a:latin typeface="Arial"/>
-              </a:rPr>
-              <a:t>Ryan Lewis (Stable CTO/MD)</a:t>
-            </a:r>
-            <a:br/>
-            <a:r>
-              <a:rPr>
-                <a:latin typeface="Arial"/>
-              </a:rPr>
-              <a:t> ryan@stable.co.uk</a:t>
-            </a:r>
-          </a:p>
+          <a:p/>
         </p:txBody>
       </p:sp>
       <p:sp>
@@ -20182,118 +19646,70 @@
       </p:sp>
       <p:sp>
         <p:nvSpPr>
-          <p:cNvPr id="3" name="Text Placeholder 2"/>
-          <p:cNvSpPr>
-            <a:spLocks noGrp="1"/>
-          </p:cNvSpPr>
-          <p:nvPr>
-            <p:ph type="body" idx="12" sz="quarter"/>
+          <p:cNvPr id="3" name="Content Placeholder 2"/>
+          <p:cNvSpPr>
+            <a:spLocks noGrp="1"/>
+          </p:cNvSpPr>
+          <p:nvPr>
+            <p:ph idx="17" sz="quarter"/>
           </p:nvPr>
         </p:nvSpPr>
         <p:spPr/>
         <p:txBody>
           <a:bodyPr/>
           <a:lstStyle/>
-          <a:p>
-            <a:pPr>
-              <a:spcBef>
-                <a:spcPts val="400"/>
-              </a:spcBef>
-            </a:pPr>
-            <a:r>
-              <a:rPr>
-                <a:latin typeface="Arial"/>
-              </a:rPr>
-              <a:t>Integrated transformation from strategy to live service</a:t>
-            </a:r>
-          </a:p>
-        </p:txBody>
-      </p:sp>
-      <p:sp>
-        <p:nvSpPr>
-          <p:cNvPr id="4" name="Text Placeholder 3"/>
-          <p:cNvSpPr>
-            <a:spLocks noGrp="1"/>
-          </p:cNvSpPr>
-          <p:nvPr>
-            <p:ph type="body" idx="13" sz="quarter"/>
+          <a:p/>
+        </p:txBody>
+      </p:sp>
+      <p:sp>
+        <p:nvSpPr>
+          <p:cNvPr id="4" name="Content Placeholder 3"/>
+          <p:cNvSpPr>
+            <a:spLocks noGrp="1"/>
+          </p:cNvSpPr>
+          <p:nvPr>
+            <p:ph idx="18" sz="quarter"/>
           </p:nvPr>
         </p:nvSpPr>
         <p:spPr/>
         <p:txBody>
           <a:bodyPr/>
           <a:lstStyle/>
-          <a:p>
-            <a:pPr>
-              <a:spcBef>
-                <a:spcPts val="400"/>
-              </a:spcBef>
-            </a:pPr>
-            <a:r>
-              <a:rPr>
-                <a:latin typeface="Arial"/>
-              </a:rPr>
-              <a:t>Local Welsh presence and bilingual engagement</a:t>
-            </a:r>
-          </a:p>
-        </p:txBody>
-      </p:sp>
-      <p:sp>
-        <p:nvSpPr>
-          <p:cNvPr id="5" name="Text Placeholder 4"/>
-          <p:cNvSpPr>
-            <a:spLocks noGrp="1"/>
-          </p:cNvSpPr>
-          <p:nvPr>
-            <p:ph type="body" idx="14" sz="quarter"/>
+          <a:p/>
+        </p:txBody>
+      </p:sp>
+      <p:sp>
+        <p:nvSpPr>
+          <p:cNvPr id="5" name="Content Placeholder 4"/>
+          <p:cNvSpPr>
+            <a:spLocks noGrp="1"/>
+          </p:cNvSpPr>
+          <p:nvPr>
+            <p:ph idx="20" sz="quarter"/>
           </p:nvPr>
         </p:nvSpPr>
         <p:spPr/>
         <p:txBody>
           <a:bodyPr/>
           <a:lstStyle/>
-          <a:p>
-            <a:pPr>
-              <a:spcBef>
-                <a:spcPts val="400"/>
-              </a:spcBef>
-            </a:pPr>
-            <a:r>
-              <a:rPr>
-                <a:latin typeface="Arial"/>
-              </a:rPr>
-              <a:t>Continuous knowledge transfer and capability uplift</a:t>
-            </a:r>
-          </a:p>
-        </p:txBody>
-      </p:sp>
-      <p:sp>
-        <p:nvSpPr>
-          <p:cNvPr id="6" name="Text Placeholder 5"/>
-          <p:cNvSpPr>
-            <a:spLocks noGrp="1"/>
-          </p:cNvSpPr>
-          <p:nvPr>
-            <p:ph type="body" idx="15" sz="quarter"/>
+          <a:p/>
+        </p:txBody>
+      </p:sp>
+      <p:sp>
+        <p:nvSpPr>
+          <p:cNvPr id="6" name="Content Placeholder 5"/>
+          <p:cNvSpPr>
+            <a:spLocks noGrp="1"/>
+          </p:cNvSpPr>
+          <p:nvPr>
+            <p:ph idx="19" sz="quarter"/>
           </p:nvPr>
         </p:nvSpPr>
         <p:spPr/>
         <p:txBody>
           <a:bodyPr/>
           <a:lstStyle/>
-          <a:p>
-            <a:pPr>
-              <a:spcBef>
-                <a:spcPts val="400"/>
-              </a:spcBef>
-            </a:pPr>
-            <a:r>
-              <a:rPr>
-                <a:latin typeface="Arial"/>
-              </a:rPr>
-              <a:t>Structured governance and delivery momentum</a:t>
-            </a:r>
-          </a:p>
+          <a:p/>
         </p:txBody>
       </p:sp>
     </p:spTree>
@@ -20360,7 +19776,7 @@
               <a:rPr>
                 <a:latin typeface="Arial"/>
               </a:rPr>
-              <a:t>Regulated environments require structured methods</a:t>
+              <a:t>Regulated delivery needs structured methods</a:t>
             </a:r>
           </a:p>
           <a:p>
@@ -20374,7 +19790,7 @@
               <a:rPr>
                 <a:latin typeface="Arial"/>
               </a:rPr>
-              <a:t>Multi-stakeholder delivery needs local engagement</a:t>
+              <a:t>Multi-stakeholder context requires local engagement</a:t>
             </a:r>
           </a:p>
           <a:p>
@@ -20388,7 +19804,7 @@
               <a:rPr>
                 <a:latin typeface="Arial"/>
               </a:rPr>
-              <a:t>Maintain operational resilience during change</a:t>
+              <a:t>Preserve operational resilience during transformation</a:t>
             </a:r>
           </a:p>
         </p:txBody>
@@ -20418,7 +19834,7 @@
               <a:rPr>
                 <a:latin typeface="Arial"/>
               </a:rPr>
-              <a:t>Capability uplift enables sustainable transformation</a:t>
+              <a:t>Capability uplift enables sustainable change</a:t>
             </a:r>
           </a:p>
           <a:p>
@@ -20446,7 +19862,7 @@
               <a:rPr>
                 <a:latin typeface="Arial"/>
               </a:rPr>
-              <a:t>Bilingual needs met via local expertise</a:t>
+              <a:t>Local bilingual expertise meets language requirements</a:t>
             </a:r>
           </a:p>
         </p:txBody>
@@ -20515,7 +19931,7 @@
               <a:rPr>
                 <a:latin typeface="Arial"/>
               </a:rPr>
-              <a:t>Local: Stable Welsh delivery partner</a:t>
+              <a:t>Stable local partner presence</a:t>
             </a:r>
           </a:p>
           <a:p>
@@ -20529,7 +19945,7 @@
               <a:rPr>
                 <a:latin typeface="Arial"/>
               </a:rPr>
-              <a:t>Local architecture &amp; engineering expertise</a:t>
+              <a:t>Welsh architecture &amp; engineering expertise</a:t>
             </a:r>
           </a:p>
           <a:p>
@@ -20543,7 +19959,7 @@
               <a:rPr>
                 <a:latin typeface="Arial"/>
               </a:rPr>
-              <a:t>Community and public-sector ties</a:t>
+              <a:t>Community and public-sector relationships</a:t>
             </a:r>
           </a:p>
           <a:p>
@@ -20587,7 +20003,7 @@
               <a:rPr>
                 <a:latin typeface="Arial"/>
               </a:rPr>
-              <a:t>Global: IBM scale and specialist accelerators</a:t>
+              <a:t>IBM global scale and specialist accelerators</a:t>
             </a:r>
           </a:p>
           <a:p>
@@ -20668,7 +20084,7 @@
           <a:lstStyle/>
           <a:p>
             <a:r>
-              <a:t>Section 2: Customer Capabilities</a:t>
+              <a:t>Customer Capabilities</a:t>
             </a:r>
           </a:p>
         </p:txBody>
@@ -20707,125 +20123,77 @@
           <a:lstStyle/>
           <a:p>
             <a:r>
-              <a:t>IBM core strengths within the DDaT Framework</a:t>
-            </a:r>
-          </a:p>
-        </p:txBody>
-      </p:sp>
-      <p:sp>
-        <p:nvSpPr>
-          <p:cNvPr id="3" name="Text Placeholder 2"/>
-          <p:cNvSpPr>
-            <a:spLocks noGrp="1"/>
-          </p:cNvSpPr>
-          <p:nvPr>
-            <p:ph type="body" idx="12" sz="quarter"/>
+              <a:t>IBM strengths in DDaT</a:t>
+            </a:r>
+          </a:p>
+        </p:txBody>
+      </p:sp>
+      <p:sp>
+        <p:nvSpPr>
+          <p:cNvPr id="3" name="Content Placeholder 2"/>
+          <p:cNvSpPr>
+            <a:spLocks noGrp="1"/>
+          </p:cNvSpPr>
+          <p:nvPr>
+            <p:ph idx="17" sz="quarter"/>
           </p:nvPr>
         </p:nvSpPr>
         <p:spPr/>
         <p:txBody>
           <a:bodyPr/>
           <a:lstStyle/>
-          <a:p>
-            <a:pPr>
-              <a:spcBef>
-                <a:spcPts val="400"/>
-              </a:spcBef>
-            </a:pPr>
-            <a:r>
-              <a:rPr>
-                <a:latin typeface="Arial"/>
-              </a:rPr>
-              <a:t>End-to-end digital, data and technology delivery</a:t>
-            </a:r>
-          </a:p>
-        </p:txBody>
-      </p:sp>
-      <p:sp>
-        <p:nvSpPr>
-          <p:cNvPr id="4" name="Text Placeholder 3"/>
-          <p:cNvSpPr>
-            <a:spLocks noGrp="1"/>
-          </p:cNvSpPr>
-          <p:nvPr>
-            <p:ph type="body" idx="13" sz="quarter"/>
+          <a:p/>
+        </p:txBody>
+      </p:sp>
+      <p:sp>
+        <p:nvSpPr>
+          <p:cNvPr id="4" name="Content Placeholder 3"/>
+          <p:cNvSpPr>
+            <a:spLocks noGrp="1"/>
+          </p:cNvSpPr>
+          <p:nvPr>
+            <p:ph idx="18" sz="quarter"/>
           </p:nvPr>
         </p:nvSpPr>
         <p:spPr/>
         <p:txBody>
           <a:bodyPr/>
           <a:lstStyle/>
-          <a:p>
-            <a:pPr>
-              <a:spcBef>
-                <a:spcPts val="400"/>
-              </a:spcBef>
-            </a:pPr>
-            <a:r>
-              <a:rPr>
-                <a:latin typeface="Arial"/>
-              </a:rPr>
-              <a:t>Structured engineering, product and design disciplines</a:t>
-            </a:r>
-          </a:p>
-        </p:txBody>
-      </p:sp>
-      <p:sp>
-        <p:nvSpPr>
-          <p:cNvPr id="5" name="Text Placeholder 4"/>
-          <p:cNvSpPr>
-            <a:spLocks noGrp="1"/>
-          </p:cNvSpPr>
-          <p:nvPr>
-            <p:ph type="body" idx="14" sz="quarter"/>
+          <a:p/>
+        </p:txBody>
+      </p:sp>
+      <p:sp>
+        <p:nvSpPr>
+          <p:cNvPr id="5" name="Content Placeholder 4"/>
+          <p:cNvSpPr>
+            <a:spLocks noGrp="1"/>
+          </p:cNvSpPr>
+          <p:nvPr>
+            <p:ph idx="20" sz="quarter"/>
           </p:nvPr>
         </p:nvSpPr>
         <p:spPr/>
         <p:txBody>
           <a:bodyPr/>
           <a:lstStyle/>
-          <a:p>
-            <a:pPr>
-              <a:spcBef>
-                <a:spcPts val="400"/>
-              </a:spcBef>
-            </a:pPr>
-            <a:r>
-              <a:rPr>
-                <a:latin typeface="Arial"/>
-              </a:rPr>
-              <a:t>Experience in complex, regulated environments</a:t>
-            </a:r>
-          </a:p>
-        </p:txBody>
-      </p:sp>
-      <p:sp>
-        <p:nvSpPr>
-          <p:cNvPr id="6" name="Text Placeholder 5"/>
-          <p:cNvSpPr>
-            <a:spLocks noGrp="1"/>
-          </p:cNvSpPr>
-          <p:nvPr>
-            <p:ph type="body" idx="15" sz="quarter"/>
+          <a:p/>
+        </p:txBody>
+      </p:sp>
+      <p:sp>
+        <p:nvSpPr>
+          <p:cNvPr id="6" name="Content Placeholder 5"/>
+          <p:cNvSpPr>
+            <a:spLocks noGrp="1"/>
+          </p:cNvSpPr>
+          <p:nvPr>
+            <p:ph idx="19" sz="quarter"/>
           </p:nvPr>
         </p:nvSpPr>
         <p:spPr/>
         <p:txBody>
           <a:bodyPr/>
           <a:lstStyle/>
-          <a:p>
-            <a:pPr>
-              <a:spcBef>
-                <a:spcPts val="400"/>
-              </a:spcBef>
-            </a:pPr>
-            <a:r>
-              <a:rPr>
-                <a:latin typeface="Arial"/>
-              </a:rPr>
-              <a:t>Sustainable capability building and knowledge transfer</a:t>
-            </a:r>
-          </a:p>
+          <a:p/>
         </p:txBody>
       </p:sp>
     </p:spTree>
